--- a/Lab3.pptx
+++ b/Lab3.pptx
@@ -116,12 +116,20 @@
 </p:presentation>
 </file>
 
+<file path=ppt/revisionInfo.xml><?xml version="1.0" encoding="utf-8"?>
+<p1510:revInfo xmlns:a="http://schemas.openxmlformats.org/drawingml/2006/main" xmlns:r="http://schemas.openxmlformats.org/officeDocument/2006/relationships" xmlns:p1510="http://schemas.microsoft.com/office/powerpoint/2015/10/main">
+  <p1510:revLst>
+    <p1510:client id="{0AF8ABA1-FB27-4DA0-9762-78B19B59A4B7}" v="35" dt="2023-09-27T18:58:09.949"/>
+  </p1510:revLst>
+</p1510:revInfo>
+</file>
+
 <file path=ppt/changesInfos/changesInfo1.xml><?xml version="1.0" encoding="utf-8"?>
 <pc:chgInfo xmlns:a="http://schemas.openxmlformats.org/drawingml/2006/main" xmlns:r="http://schemas.openxmlformats.org/officeDocument/2006/relationships" xmlns:ac="http://schemas.microsoft.com/office/drawing/2013/main/command" xmlns:pc="http://schemas.microsoft.com/office/powerpoint/2013/main/command">
   <pc:docChgLst>
     <pc:chgData name="Khattab, Sherif" userId="c83b1e15-36f3-4f46-aceb-05aac24c545e" providerId="ADAL" clId="{0AF8ABA1-FB27-4DA0-9762-78B19B59A4B7}"/>
-    <pc:docChg chg="custSel modSld">
-      <pc:chgData name="Khattab, Sherif" userId="c83b1e15-36f3-4f46-aceb-05aac24c545e" providerId="ADAL" clId="{0AF8ABA1-FB27-4DA0-9762-78B19B59A4B7}" dt="2023-09-27T18:23:33.486" v="292" actId="20577"/>
+    <pc:docChg chg="undo custSel addSld delSld modSld">
+      <pc:chgData name="Khattab, Sherif" userId="c83b1e15-36f3-4f46-aceb-05aac24c545e" providerId="ADAL" clId="{0AF8ABA1-FB27-4DA0-9762-78B19B59A4B7}" dt="2023-09-27T19:14:27.207" v="774" actId="47"/>
       <pc:docMkLst>
         <pc:docMk/>
       </pc:docMkLst>
@@ -193,18 +201,1825 @@
           </ac:spMkLst>
         </pc:spChg>
       </pc:sldChg>
-      <pc:sldChg chg="modSp mod">
-        <pc:chgData name="Khattab, Sherif" userId="c83b1e15-36f3-4f46-aceb-05aac24c545e" providerId="ADAL" clId="{0AF8ABA1-FB27-4DA0-9762-78B19B59A4B7}" dt="2023-09-27T18:21:42.753" v="273" actId="20577"/>
+      <pc:sldChg chg="addSp delSp modSp mod">
+        <pc:chgData name="Khattab, Sherif" userId="c83b1e15-36f3-4f46-aceb-05aac24c545e" providerId="ADAL" clId="{0AF8ABA1-FB27-4DA0-9762-78B19B59A4B7}" dt="2023-09-27T19:14:22.514" v="773" actId="313"/>
         <pc:sldMkLst>
           <pc:docMk/>
           <pc:sldMk cId="3456616918" sldId="277"/>
         </pc:sldMkLst>
         <pc:spChg chg="mod">
-          <ac:chgData name="Khattab, Sherif" userId="c83b1e15-36f3-4f46-aceb-05aac24c545e" providerId="ADAL" clId="{0AF8ABA1-FB27-4DA0-9762-78B19B59A4B7}" dt="2023-09-27T18:21:42.753" v="273" actId="20577"/>
+          <ac:chgData name="Khattab, Sherif" userId="c83b1e15-36f3-4f46-aceb-05aac24c545e" providerId="ADAL" clId="{0AF8ABA1-FB27-4DA0-9762-78B19B59A4B7}" dt="2023-09-27T19:14:22.514" v="773" actId="313"/>
           <ac:spMkLst>
             <pc:docMk/>
             <pc:sldMk cId="3456616918" sldId="277"/>
             <ac:spMk id="3" creationId="{AEC3B1FD-3A18-E54C-BDCF-8D8CCA61AA14}"/>
+          </ac:spMkLst>
+        </pc:spChg>
+        <pc:grpChg chg="del mod">
+          <ac:chgData name="Khattab, Sherif" userId="c83b1e15-36f3-4f46-aceb-05aac24c545e" providerId="ADAL" clId="{0AF8ABA1-FB27-4DA0-9762-78B19B59A4B7}" dt="2023-09-27T18:52:32.885" v="329"/>
+          <ac:grpSpMkLst>
+            <pc:docMk/>
+            <pc:sldMk cId="3456616918" sldId="277"/>
+            <ac:grpSpMk id="8" creationId="{743015FD-5D04-B0E8-7C0B-C00A3805B385}"/>
+          </ac:grpSpMkLst>
+        </pc:grpChg>
+        <pc:grpChg chg="del mod">
+          <ac:chgData name="Khattab, Sherif" userId="c83b1e15-36f3-4f46-aceb-05aac24c545e" providerId="ADAL" clId="{0AF8ABA1-FB27-4DA0-9762-78B19B59A4B7}" dt="2023-09-27T18:52:32.885" v="329"/>
+          <ac:grpSpMkLst>
+            <pc:docMk/>
+            <pc:sldMk cId="3456616918" sldId="277"/>
+            <ac:grpSpMk id="13" creationId="{6931FDE0-6959-AC06-493B-8B914E66FF93}"/>
+          </ac:grpSpMkLst>
+        </pc:grpChg>
+        <pc:grpChg chg="del mod">
+          <ac:chgData name="Khattab, Sherif" userId="c83b1e15-36f3-4f46-aceb-05aac24c545e" providerId="ADAL" clId="{0AF8ABA1-FB27-4DA0-9762-78B19B59A4B7}" dt="2023-09-27T18:52:26.041" v="316"/>
+          <ac:grpSpMkLst>
+            <pc:docMk/>
+            <pc:sldMk cId="3456616918" sldId="277"/>
+            <ac:grpSpMk id="19" creationId="{D6FD1396-FDB8-B590-8513-3D96E04FA455}"/>
+          </ac:grpSpMkLst>
+        </pc:grpChg>
+        <pc:grpChg chg="add del mod">
+          <ac:chgData name="Khattab, Sherif" userId="c83b1e15-36f3-4f46-aceb-05aac24c545e" providerId="ADAL" clId="{0AF8ABA1-FB27-4DA0-9762-78B19B59A4B7}" dt="2023-09-27T18:54:08.099" v="425"/>
+          <ac:grpSpMkLst>
+            <pc:docMk/>
+            <pc:sldMk cId="3456616918" sldId="277"/>
+            <ac:grpSpMk id="23" creationId="{03564E6F-FC36-F393-EA02-C36E793A7E25}"/>
+          </ac:grpSpMkLst>
+        </pc:grpChg>
+        <pc:grpChg chg="del mod">
+          <ac:chgData name="Khattab, Sherif" userId="c83b1e15-36f3-4f46-aceb-05aac24c545e" providerId="ADAL" clId="{0AF8ABA1-FB27-4DA0-9762-78B19B59A4B7}" dt="2023-09-27T18:52:32.885" v="329"/>
+          <ac:grpSpMkLst>
+            <pc:docMk/>
+            <pc:sldMk cId="3456616918" sldId="277"/>
+            <ac:grpSpMk id="26" creationId="{5D950EA4-B165-3ED3-B93D-ABDBE20EDED7}"/>
+          </ac:grpSpMkLst>
+        </pc:grpChg>
+        <pc:grpChg chg="del mod">
+          <ac:chgData name="Khattab, Sherif" userId="c83b1e15-36f3-4f46-aceb-05aac24c545e" providerId="ADAL" clId="{0AF8ABA1-FB27-4DA0-9762-78B19B59A4B7}" dt="2023-09-27T18:52:39.250" v="336"/>
+          <ac:grpSpMkLst>
+            <pc:docMk/>
+            <pc:sldMk cId="3456616918" sldId="277"/>
+            <ac:grpSpMk id="39" creationId="{7F4D365D-FD5B-DED4-0F45-CED4FDA9A550}"/>
+          </ac:grpSpMkLst>
+        </pc:grpChg>
+        <pc:grpChg chg="del mod">
+          <ac:chgData name="Khattab, Sherif" userId="c83b1e15-36f3-4f46-aceb-05aac24c545e" providerId="ADAL" clId="{0AF8ABA1-FB27-4DA0-9762-78B19B59A4B7}" dt="2023-09-27T18:52:46.575" v="350"/>
+          <ac:grpSpMkLst>
+            <pc:docMk/>
+            <pc:sldMk cId="3456616918" sldId="277"/>
+            <ac:grpSpMk id="46" creationId="{EF3E2AA4-8038-969E-7C37-C1BFC2756662}"/>
+          </ac:grpSpMkLst>
+        </pc:grpChg>
+        <pc:grpChg chg="del mod">
+          <ac:chgData name="Khattab, Sherif" userId="c83b1e15-36f3-4f46-aceb-05aac24c545e" providerId="ADAL" clId="{0AF8ABA1-FB27-4DA0-9762-78B19B59A4B7}" dt="2023-09-27T18:52:49.632" v="357"/>
+          <ac:grpSpMkLst>
+            <pc:docMk/>
+            <pc:sldMk cId="3456616918" sldId="277"/>
+            <ac:grpSpMk id="60" creationId="{2EB595FE-2D66-1ADA-F36A-484F2799EA9F}"/>
+          </ac:grpSpMkLst>
+        </pc:grpChg>
+        <pc:grpChg chg="del mod">
+          <ac:chgData name="Khattab, Sherif" userId="c83b1e15-36f3-4f46-aceb-05aac24c545e" providerId="ADAL" clId="{0AF8ABA1-FB27-4DA0-9762-78B19B59A4B7}" dt="2023-09-27T18:53:00.849" v="371"/>
+          <ac:grpSpMkLst>
+            <pc:docMk/>
+            <pc:sldMk cId="3456616918" sldId="277"/>
+            <ac:grpSpMk id="67" creationId="{98824029-F2CE-5215-CD67-1C64D2ED42DF}"/>
+          </ac:grpSpMkLst>
+        </pc:grpChg>
+        <pc:grpChg chg="add del mod">
+          <ac:chgData name="Khattab, Sherif" userId="c83b1e15-36f3-4f46-aceb-05aac24c545e" providerId="ADAL" clId="{0AF8ABA1-FB27-4DA0-9762-78B19B59A4B7}" dt="2023-09-27T18:54:08.099" v="425"/>
+          <ac:grpSpMkLst>
+            <pc:docMk/>
+            <pc:sldMk cId="3456616918" sldId="277"/>
+            <ac:grpSpMk id="81" creationId="{BD3131BE-1FA8-CB3C-247D-7CA693781175}"/>
+          </ac:grpSpMkLst>
+        </pc:grpChg>
+        <pc:grpChg chg="add del mod">
+          <ac:chgData name="Khattab, Sherif" userId="c83b1e15-36f3-4f46-aceb-05aac24c545e" providerId="ADAL" clId="{0AF8ABA1-FB27-4DA0-9762-78B19B59A4B7}" dt="2023-09-27T18:54:08.099" v="425"/>
+          <ac:grpSpMkLst>
+            <pc:docMk/>
+            <pc:sldMk cId="3456616918" sldId="277"/>
+            <ac:grpSpMk id="88" creationId="{34BC052A-4B81-DECA-758C-A3F8F1C06E9B}"/>
+          </ac:grpSpMkLst>
+        </pc:grpChg>
+        <pc:grpChg chg="add del mod">
+          <ac:chgData name="Khattab, Sherif" userId="c83b1e15-36f3-4f46-aceb-05aac24c545e" providerId="ADAL" clId="{0AF8ABA1-FB27-4DA0-9762-78B19B59A4B7}" dt="2023-09-27T18:54:08.099" v="425"/>
+          <ac:grpSpMkLst>
+            <pc:docMk/>
+            <pc:sldMk cId="3456616918" sldId="277"/>
+            <ac:grpSpMk id="89" creationId="{125D2AE1-8B32-A77F-F31E-7159C6D7776B}"/>
+          </ac:grpSpMkLst>
+        </pc:grpChg>
+        <pc:grpChg chg="add del mod">
+          <ac:chgData name="Khattab, Sherif" userId="c83b1e15-36f3-4f46-aceb-05aac24c545e" providerId="ADAL" clId="{0AF8ABA1-FB27-4DA0-9762-78B19B59A4B7}" dt="2023-09-27T18:53:58.615" v="406"/>
+          <ac:grpSpMkLst>
+            <pc:docMk/>
+            <pc:sldMk cId="3456616918" sldId="277"/>
+            <ac:grpSpMk id="111" creationId="{923C5ED2-4511-2E99-0BC6-9E9810E1CE2B}"/>
+          </ac:grpSpMkLst>
+        </pc:grpChg>
+        <pc:grpChg chg="mod">
+          <ac:chgData name="Khattab, Sherif" userId="c83b1e15-36f3-4f46-aceb-05aac24c545e" providerId="ADAL" clId="{0AF8ABA1-FB27-4DA0-9762-78B19B59A4B7}" dt="2023-09-27T18:53:58.236" v="404"/>
+          <ac:grpSpMkLst>
+            <pc:docMk/>
+            <pc:sldMk cId="3456616918" sldId="277"/>
+            <ac:grpSpMk id="113" creationId="{1FE1019E-C68E-4B4B-5367-2EB1AD9F41A9}"/>
+          </ac:grpSpMkLst>
+        </pc:grpChg>
+        <pc:grpChg chg="del mod">
+          <ac:chgData name="Khattab, Sherif" userId="c83b1e15-36f3-4f46-aceb-05aac24c545e" providerId="ADAL" clId="{0AF8ABA1-FB27-4DA0-9762-78B19B59A4B7}" dt="2023-09-27T18:54:08.099" v="425"/>
+          <ac:grpSpMkLst>
+            <pc:docMk/>
+            <pc:sldMk cId="3456616918" sldId="277"/>
+            <ac:grpSpMk id="119" creationId="{B494AA46-31EF-63B1-707E-A5DEA96FBF98}"/>
+          </ac:grpSpMkLst>
+        </pc:grpChg>
+        <pc:grpChg chg="del mod">
+          <ac:chgData name="Khattab, Sherif" userId="c83b1e15-36f3-4f46-aceb-05aac24c545e" providerId="ADAL" clId="{0AF8ABA1-FB27-4DA0-9762-78B19B59A4B7}" dt="2023-09-27T18:54:13.815" v="435"/>
+          <ac:grpSpMkLst>
+            <pc:docMk/>
+            <pc:sldMk cId="3456616918" sldId="277"/>
+            <ac:grpSpMk id="126" creationId="{16A72FB9-6274-5CA1-487D-252EA109EC23}"/>
+          </ac:grpSpMkLst>
+        </pc:grpChg>
+        <pc:grpChg chg="del mod">
+          <ac:chgData name="Khattab, Sherif" userId="c83b1e15-36f3-4f46-aceb-05aac24c545e" providerId="ADAL" clId="{0AF8ABA1-FB27-4DA0-9762-78B19B59A4B7}" dt="2023-09-27T18:54:52.765" v="466"/>
+          <ac:grpSpMkLst>
+            <pc:docMk/>
+            <pc:sldMk cId="3456616918" sldId="277"/>
+            <ac:grpSpMk id="136" creationId="{F870F9B4-F9F2-FB4F-7A36-61495A6FA2EA}"/>
+          </ac:grpSpMkLst>
+        </pc:grpChg>
+        <pc:grpChg chg="del mod">
+          <ac:chgData name="Khattab, Sherif" userId="c83b1e15-36f3-4f46-aceb-05aac24c545e" providerId="ADAL" clId="{0AF8ABA1-FB27-4DA0-9762-78B19B59A4B7}" dt="2023-09-27T19:14:17.235" v="770" actId="478"/>
+          <ac:grpSpMkLst>
+            <pc:docMk/>
+            <pc:sldMk cId="3456616918" sldId="277"/>
+            <ac:grpSpMk id="144" creationId="{5392BBBB-EC96-6276-45D8-3B59374A48D1}"/>
+          </ac:grpSpMkLst>
+        </pc:grpChg>
+        <pc:grpChg chg="del mod">
+          <ac:chgData name="Khattab, Sherif" userId="c83b1e15-36f3-4f46-aceb-05aac24c545e" providerId="ADAL" clId="{0AF8ABA1-FB27-4DA0-9762-78B19B59A4B7}" dt="2023-09-27T19:14:17.235" v="770" actId="478"/>
+          <ac:grpSpMkLst>
+            <pc:docMk/>
+            <pc:sldMk cId="3456616918" sldId="277"/>
+            <ac:grpSpMk id="150" creationId="{EE5DB836-6FB8-2BCF-9F71-8CD8E37B35E1}"/>
+          </ac:grpSpMkLst>
+        </pc:grpChg>
+        <pc:grpChg chg="del mod">
+          <ac:chgData name="Khattab, Sherif" userId="c83b1e15-36f3-4f46-aceb-05aac24c545e" providerId="ADAL" clId="{0AF8ABA1-FB27-4DA0-9762-78B19B59A4B7}" dt="2023-09-27T18:54:52.765" v="466"/>
+          <ac:grpSpMkLst>
+            <pc:docMk/>
+            <pc:sldMk cId="3456616918" sldId="277"/>
+            <ac:grpSpMk id="158" creationId="{43204A61-06BC-5588-7C57-63BD89555F06}"/>
+          </ac:grpSpMkLst>
+        </pc:grpChg>
+        <pc:grpChg chg="del mod">
+          <ac:chgData name="Khattab, Sherif" userId="c83b1e15-36f3-4f46-aceb-05aac24c545e" providerId="ADAL" clId="{0AF8ABA1-FB27-4DA0-9762-78B19B59A4B7}" dt="2023-09-27T18:54:52.765" v="466"/>
+          <ac:grpSpMkLst>
+            <pc:docMk/>
+            <pc:sldMk cId="3456616918" sldId="277"/>
+            <ac:grpSpMk id="159" creationId="{0E3152FA-6470-7487-3070-DCDC49C02F00}"/>
+          </ac:grpSpMkLst>
+        </pc:grpChg>
+        <pc:grpChg chg="del mod">
+          <ac:chgData name="Khattab, Sherif" userId="c83b1e15-36f3-4f46-aceb-05aac24c545e" providerId="ADAL" clId="{0AF8ABA1-FB27-4DA0-9762-78B19B59A4B7}" dt="2023-09-27T18:54:52.765" v="466"/>
+          <ac:grpSpMkLst>
+            <pc:docMk/>
+            <pc:sldMk cId="3456616918" sldId="277"/>
+            <ac:grpSpMk id="160" creationId="{04DB5F5B-6D9C-0D1D-BE7E-149C3C0DC76F}"/>
+          </ac:grpSpMkLst>
+        </pc:grpChg>
+        <pc:grpChg chg="del mod">
+          <ac:chgData name="Khattab, Sherif" userId="c83b1e15-36f3-4f46-aceb-05aac24c545e" providerId="ADAL" clId="{0AF8ABA1-FB27-4DA0-9762-78B19B59A4B7}" dt="2023-09-27T18:54:52.765" v="466"/>
+          <ac:grpSpMkLst>
+            <pc:docMk/>
+            <pc:sldMk cId="3456616918" sldId="277"/>
+            <ac:grpSpMk id="169" creationId="{59123C9D-7253-BB56-CCBE-B5A61AF5467D}"/>
+          </ac:grpSpMkLst>
+        </pc:grpChg>
+        <pc:grpChg chg="del mod">
+          <ac:chgData name="Khattab, Sherif" userId="c83b1e15-36f3-4f46-aceb-05aac24c545e" providerId="ADAL" clId="{0AF8ABA1-FB27-4DA0-9762-78B19B59A4B7}" dt="2023-09-27T18:54:56.913" v="474"/>
+          <ac:grpSpMkLst>
+            <pc:docMk/>
+            <pc:sldMk cId="3456616918" sldId="277"/>
+            <ac:grpSpMk id="170" creationId="{4F50CE96-4607-52EA-2806-6A1569020ECA}"/>
+          </ac:grpSpMkLst>
+        </pc:grpChg>
+        <pc:grpChg chg="del mod">
+          <ac:chgData name="Khattab, Sherif" userId="c83b1e15-36f3-4f46-aceb-05aac24c545e" providerId="ADAL" clId="{0AF8ABA1-FB27-4DA0-9762-78B19B59A4B7}" dt="2023-09-27T18:55:13.079" v="479"/>
+          <ac:grpSpMkLst>
+            <pc:docMk/>
+            <pc:sldMk cId="3456616918" sldId="277"/>
+            <ac:grpSpMk id="178" creationId="{DC90AC48-5363-944D-E3DC-D176E397C5C2}"/>
+          </ac:grpSpMkLst>
+        </pc:grpChg>
+        <pc:grpChg chg="del mod">
+          <ac:chgData name="Khattab, Sherif" userId="c83b1e15-36f3-4f46-aceb-05aac24c545e" providerId="ADAL" clId="{0AF8ABA1-FB27-4DA0-9762-78B19B59A4B7}" dt="2023-09-27T18:55:13.079" v="479"/>
+          <ac:grpSpMkLst>
+            <pc:docMk/>
+            <pc:sldMk cId="3456616918" sldId="277"/>
+            <ac:grpSpMk id="181" creationId="{84C02B13-B7A8-B9E0-9491-10F1D6251A88}"/>
+          </ac:grpSpMkLst>
+        </pc:grpChg>
+        <pc:grpChg chg="del mod">
+          <ac:chgData name="Khattab, Sherif" userId="c83b1e15-36f3-4f46-aceb-05aac24c545e" providerId="ADAL" clId="{0AF8ABA1-FB27-4DA0-9762-78B19B59A4B7}" dt="2023-09-27T18:55:17.980" v="485"/>
+          <ac:grpSpMkLst>
+            <pc:docMk/>
+            <pc:sldMk cId="3456616918" sldId="277"/>
+            <ac:grpSpMk id="183" creationId="{9BD2B0C4-4819-5702-8B0D-E3649487A24C}"/>
+          </ac:grpSpMkLst>
+        </pc:grpChg>
+        <pc:grpChg chg="del mod">
+          <ac:chgData name="Khattab, Sherif" userId="c83b1e15-36f3-4f46-aceb-05aac24c545e" providerId="ADAL" clId="{0AF8ABA1-FB27-4DA0-9762-78B19B59A4B7}" dt="2023-09-27T18:55:19.436" v="488"/>
+          <ac:grpSpMkLst>
+            <pc:docMk/>
+            <pc:sldMk cId="3456616918" sldId="277"/>
+            <ac:grpSpMk id="189" creationId="{C80E5933-359F-233F-DD6D-2CDE1B644545}"/>
+          </ac:grpSpMkLst>
+        </pc:grpChg>
+        <pc:grpChg chg="del mod">
+          <ac:chgData name="Khattab, Sherif" userId="c83b1e15-36f3-4f46-aceb-05aac24c545e" providerId="ADAL" clId="{0AF8ABA1-FB27-4DA0-9762-78B19B59A4B7}" dt="2023-09-27T18:56:24.873" v="502"/>
+          <ac:grpSpMkLst>
+            <pc:docMk/>
+            <pc:sldMk cId="3456616918" sldId="277"/>
+            <ac:grpSpMk id="192" creationId="{D322F3EF-A373-103B-2E13-4670283B4B70}"/>
+          </ac:grpSpMkLst>
+        </pc:grpChg>
+        <pc:grpChg chg="del mod">
+          <ac:chgData name="Khattab, Sherif" userId="c83b1e15-36f3-4f46-aceb-05aac24c545e" providerId="ADAL" clId="{0AF8ABA1-FB27-4DA0-9762-78B19B59A4B7}" dt="2023-09-27T18:55:29.685" v="498"/>
+          <ac:grpSpMkLst>
+            <pc:docMk/>
+            <pc:sldMk cId="3456616918" sldId="277"/>
+            <ac:grpSpMk id="197" creationId="{793CD507-5445-F99D-5ECE-5F34436D2A25}"/>
+          </ac:grpSpMkLst>
+        </pc:grpChg>
+        <pc:grpChg chg="del mod">
+          <ac:chgData name="Khattab, Sherif" userId="c83b1e15-36f3-4f46-aceb-05aac24c545e" providerId="ADAL" clId="{0AF8ABA1-FB27-4DA0-9762-78B19B59A4B7}" dt="2023-09-27T19:14:17.235" v="770" actId="478"/>
+          <ac:grpSpMkLst>
+            <pc:docMk/>
+            <pc:sldMk cId="3456616918" sldId="277"/>
+            <ac:grpSpMk id="202" creationId="{AA574533-968B-0630-695F-E06B41CF8E2D}"/>
+          </ac:grpSpMkLst>
+        </pc:grpChg>
+        <pc:grpChg chg="del mod">
+          <ac:chgData name="Khattab, Sherif" userId="c83b1e15-36f3-4f46-aceb-05aac24c545e" providerId="ADAL" clId="{0AF8ABA1-FB27-4DA0-9762-78B19B59A4B7}" dt="2023-09-27T19:14:17.235" v="770" actId="478"/>
+          <ac:grpSpMkLst>
+            <pc:docMk/>
+            <pc:sldMk cId="3456616918" sldId="277"/>
+            <ac:grpSpMk id="203" creationId="{586A2822-6647-ABB7-45BD-9D3EE888E377}"/>
+          </ac:grpSpMkLst>
+        </pc:grpChg>
+        <pc:grpChg chg="del mod">
+          <ac:chgData name="Khattab, Sherif" userId="c83b1e15-36f3-4f46-aceb-05aac24c545e" providerId="ADAL" clId="{0AF8ABA1-FB27-4DA0-9762-78B19B59A4B7}" dt="2023-09-27T18:57:17.007" v="523"/>
+          <ac:grpSpMkLst>
+            <pc:docMk/>
+            <pc:sldMk cId="3456616918" sldId="277"/>
+            <ac:grpSpMk id="207" creationId="{5F86E786-9086-8589-CDEF-EDF4B1078131}"/>
+          </ac:grpSpMkLst>
+        </pc:grpChg>
+        <pc:grpChg chg="mod">
+          <ac:chgData name="Khattab, Sherif" userId="c83b1e15-36f3-4f46-aceb-05aac24c545e" providerId="ADAL" clId="{0AF8ABA1-FB27-4DA0-9762-78B19B59A4B7}" dt="2023-09-27T18:56:42.830" v="511"/>
+          <ac:grpSpMkLst>
+            <pc:docMk/>
+            <pc:sldMk cId="3456616918" sldId="277"/>
+            <ac:grpSpMk id="214" creationId="{9557EA9D-AED9-7CB3-0106-28C2A7D7D310}"/>
+          </ac:grpSpMkLst>
+        </pc:grpChg>
+        <pc:grpChg chg="mod">
+          <ac:chgData name="Khattab, Sherif" userId="c83b1e15-36f3-4f46-aceb-05aac24c545e" providerId="ADAL" clId="{0AF8ABA1-FB27-4DA0-9762-78B19B59A4B7}" dt="2023-09-27T18:56:42.830" v="511"/>
+          <ac:grpSpMkLst>
+            <pc:docMk/>
+            <pc:sldMk cId="3456616918" sldId="277"/>
+            <ac:grpSpMk id="215" creationId="{0488B67E-8E91-D452-B066-583E67767ED7}"/>
+          </ac:grpSpMkLst>
+        </pc:grpChg>
+        <pc:grpChg chg="del mod">
+          <ac:chgData name="Khattab, Sherif" userId="c83b1e15-36f3-4f46-aceb-05aac24c545e" providerId="ADAL" clId="{0AF8ABA1-FB27-4DA0-9762-78B19B59A4B7}" dt="2023-09-27T18:57:19.057" v="526"/>
+          <ac:grpSpMkLst>
+            <pc:docMk/>
+            <pc:sldMk cId="3456616918" sldId="277"/>
+            <ac:grpSpMk id="222" creationId="{EFAFCF12-7344-E2AA-4B93-F4D789A9C9F7}"/>
+          </ac:grpSpMkLst>
+        </pc:grpChg>
+        <pc:grpChg chg="del mod">
+          <ac:chgData name="Khattab, Sherif" userId="c83b1e15-36f3-4f46-aceb-05aac24c545e" providerId="ADAL" clId="{0AF8ABA1-FB27-4DA0-9762-78B19B59A4B7}" dt="2023-09-27T18:58:09.949" v="528"/>
+          <ac:grpSpMkLst>
+            <pc:docMk/>
+            <pc:sldMk cId="3456616918" sldId="277"/>
+            <ac:grpSpMk id="225" creationId="{664F9774-ECFF-68E7-6CC6-29F2C9FEDDF0}"/>
+          </ac:grpSpMkLst>
+        </pc:grpChg>
+        <pc:grpChg chg="del mod">
+          <ac:chgData name="Khattab, Sherif" userId="c83b1e15-36f3-4f46-aceb-05aac24c545e" providerId="ADAL" clId="{0AF8ABA1-FB27-4DA0-9762-78B19B59A4B7}" dt="2023-09-27T19:14:20.273" v="772" actId="478"/>
+          <ac:grpSpMkLst>
+            <pc:docMk/>
+            <pc:sldMk cId="3456616918" sldId="277"/>
+            <ac:grpSpMk id="227" creationId="{A5CA59A3-77A9-4003-63A1-839BC06CD7B5}"/>
+          </ac:grpSpMkLst>
+        </pc:grpChg>
+        <pc:inkChg chg="add del">
+          <ac:chgData name="Khattab, Sherif" userId="c83b1e15-36f3-4f46-aceb-05aac24c545e" providerId="ADAL" clId="{0AF8ABA1-FB27-4DA0-9762-78B19B59A4B7}" dt="2023-09-27T18:41:38.023" v="294" actId="9405"/>
+          <ac:inkMkLst>
+            <pc:docMk/>
+            <pc:sldMk cId="3456616918" sldId="277"/>
+            <ac:inkMk id="4" creationId="{90B81D80-5733-AEA4-5337-BED2048F4594}"/>
+          </ac:inkMkLst>
+        </pc:inkChg>
+        <pc:inkChg chg="add del mod">
+          <ac:chgData name="Khattab, Sherif" userId="c83b1e15-36f3-4f46-aceb-05aac24c545e" providerId="ADAL" clId="{0AF8ABA1-FB27-4DA0-9762-78B19B59A4B7}" dt="2023-09-27T19:14:19.406" v="771" actId="478"/>
+          <ac:inkMkLst>
+            <pc:docMk/>
+            <pc:sldMk cId="3456616918" sldId="277"/>
+            <ac:inkMk id="5" creationId="{5E31E403-E4AF-6B24-E787-F5D3C4454DAF}"/>
+          </ac:inkMkLst>
+        </pc:inkChg>
+        <pc:inkChg chg="add del mod">
+          <ac:chgData name="Khattab, Sherif" userId="c83b1e15-36f3-4f46-aceb-05aac24c545e" providerId="ADAL" clId="{0AF8ABA1-FB27-4DA0-9762-78B19B59A4B7}" dt="2023-09-27T19:14:19.406" v="771" actId="478"/>
+          <ac:inkMkLst>
+            <pc:docMk/>
+            <pc:sldMk cId="3456616918" sldId="277"/>
+            <ac:inkMk id="6" creationId="{986D627A-EFD4-BB43-F5D5-22C8A36E4EF4}"/>
+          </ac:inkMkLst>
+        </pc:inkChg>
+        <pc:inkChg chg="add del mod">
+          <ac:chgData name="Khattab, Sherif" userId="c83b1e15-36f3-4f46-aceb-05aac24c545e" providerId="ADAL" clId="{0AF8ABA1-FB27-4DA0-9762-78B19B59A4B7}" dt="2023-09-27T19:14:13.981" v="769" actId="478"/>
+          <ac:inkMkLst>
+            <pc:docMk/>
+            <pc:sldMk cId="3456616918" sldId="277"/>
+            <ac:inkMk id="7" creationId="{DCA55728-EE2A-0F99-DBF8-25B667B6F821}"/>
+          </ac:inkMkLst>
+        </pc:inkChg>
+        <pc:inkChg chg="add del mod">
+          <ac:chgData name="Khattab, Sherif" userId="c83b1e15-36f3-4f46-aceb-05aac24c545e" providerId="ADAL" clId="{0AF8ABA1-FB27-4DA0-9762-78B19B59A4B7}" dt="2023-09-27T19:14:13.981" v="769" actId="478"/>
+          <ac:inkMkLst>
+            <pc:docMk/>
+            <pc:sldMk cId="3456616918" sldId="277"/>
+            <ac:inkMk id="9" creationId="{6754BAB1-E7A4-C525-B585-5942765C4631}"/>
+          </ac:inkMkLst>
+        </pc:inkChg>
+        <pc:inkChg chg="add del mod">
+          <ac:chgData name="Khattab, Sherif" userId="c83b1e15-36f3-4f46-aceb-05aac24c545e" providerId="ADAL" clId="{0AF8ABA1-FB27-4DA0-9762-78B19B59A4B7}" dt="2023-09-27T19:14:13.981" v="769" actId="478"/>
+          <ac:inkMkLst>
+            <pc:docMk/>
+            <pc:sldMk cId="3456616918" sldId="277"/>
+            <ac:inkMk id="10" creationId="{5883B171-E826-88CF-CDCB-BF037F77569E}"/>
+          </ac:inkMkLst>
+        </pc:inkChg>
+        <pc:inkChg chg="add del mod">
+          <ac:chgData name="Khattab, Sherif" userId="c83b1e15-36f3-4f46-aceb-05aac24c545e" providerId="ADAL" clId="{0AF8ABA1-FB27-4DA0-9762-78B19B59A4B7}" dt="2023-09-27T19:14:13.981" v="769" actId="478"/>
+          <ac:inkMkLst>
+            <pc:docMk/>
+            <pc:sldMk cId="3456616918" sldId="277"/>
+            <ac:inkMk id="11" creationId="{E02F0762-F169-0D4A-07F4-5A34C9265073}"/>
+          </ac:inkMkLst>
+        </pc:inkChg>
+        <pc:inkChg chg="add del mod">
+          <ac:chgData name="Khattab, Sherif" userId="c83b1e15-36f3-4f46-aceb-05aac24c545e" providerId="ADAL" clId="{0AF8ABA1-FB27-4DA0-9762-78B19B59A4B7}" dt="2023-09-27T19:14:13.981" v="769" actId="478"/>
+          <ac:inkMkLst>
+            <pc:docMk/>
+            <pc:sldMk cId="3456616918" sldId="277"/>
+            <ac:inkMk id="12" creationId="{55497E3A-484C-882B-0D76-2126CCC14463}"/>
+          </ac:inkMkLst>
+        </pc:inkChg>
+        <pc:inkChg chg="add del mod">
+          <ac:chgData name="Khattab, Sherif" userId="c83b1e15-36f3-4f46-aceb-05aac24c545e" providerId="ADAL" clId="{0AF8ABA1-FB27-4DA0-9762-78B19B59A4B7}" dt="2023-09-27T19:14:13.981" v="769" actId="478"/>
+          <ac:inkMkLst>
+            <pc:docMk/>
+            <pc:sldMk cId="3456616918" sldId="277"/>
+            <ac:inkMk id="14" creationId="{A47AEBAA-2309-5AC6-A32C-A57A3BE81048}"/>
+          </ac:inkMkLst>
+        </pc:inkChg>
+        <pc:inkChg chg="add del mod">
+          <ac:chgData name="Khattab, Sherif" userId="c83b1e15-36f3-4f46-aceb-05aac24c545e" providerId="ADAL" clId="{0AF8ABA1-FB27-4DA0-9762-78B19B59A4B7}" dt="2023-09-27T19:14:13.981" v="769" actId="478"/>
+          <ac:inkMkLst>
+            <pc:docMk/>
+            <pc:sldMk cId="3456616918" sldId="277"/>
+            <ac:inkMk id="15" creationId="{58A887E9-C7B9-7564-B825-7DDF0B8E04A8}"/>
+          </ac:inkMkLst>
+        </pc:inkChg>
+        <pc:inkChg chg="add del mod">
+          <ac:chgData name="Khattab, Sherif" userId="c83b1e15-36f3-4f46-aceb-05aac24c545e" providerId="ADAL" clId="{0AF8ABA1-FB27-4DA0-9762-78B19B59A4B7}" dt="2023-09-27T19:14:13.981" v="769" actId="478"/>
+          <ac:inkMkLst>
+            <pc:docMk/>
+            <pc:sldMk cId="3456616918" sldId="277"/>
+            <ac:inkMk id="16" creationId="{E0E64FAE-8239-0275-58A6-47643F80A36F}"/>
+          </ac:inkMkLst>
+        </pc:inkChg>
+        <pc:inkChg chg="add del mod">
+          <ac:chgData name="Khattab, Sherif" userId="c83b1e15-36f3-4f46-aceb-05aac24c545e" providerId="ADAL" clId="{0AF8ABA1-FB27-4DA0-9762-78B19B59A4B7}" dt="2023-09-27T19:14:13.981" v="769" actId="478"/>
+          <ac:inkMkLst>
+            <pc:docMk/>
+            <pc:sldMk cId="3456616918" sldId="277"/>
+            <ac:inkMk id="17" creationId="{DBFAA53A-9937-2E89-4830-962163F609DA}"/>
+          </ac:inkMkLst>
+        </pc:inkChg>
+        <pc:inkChg chg="add del mod">
+          <ac:chgData name="Khattab, Sherif" userId="c83b1e15-36f3-4f46-aceb-05aac24c545e" providerId="ADAL" clId="{0AF8ABA1-FB27-4DA0-9762-78B19B59A4B7}" dt="2023-09-27T19:14:13.981" v="769" actId="478"/>
+          <ac:inkMkLst>
+            <pc:docMk/>
+            <pc:sldMk cId="3456616918" sldId="277"/>
+            <ac:inkMk id="18" creationId="{17CC3BDD-86A6-5735-E500-136244D2E356}"/>
+          </ac:inkMkLst>
+        </pc:inkChg>
+        <pc:inkChg chg="add mod">
+          <ac:chgData name="Khattab, Sherif" userId="c83b1e15-36f3-4f46-aceb-05aac24c545e" providerId="ADAL" clId="{0AF8ABA1-FB27-4DA0-9762-78B19B59A4B7}" dt="2023-09-27T18:58:09.949" v="528"/>
+          <ac:inkMkLst>
+            <pc:docMk/>
+            <pc:sldMk cId="3456616918" sldId="277"/>
+            <ac:inkMk id="20" creationId="{DBCC594E-5753-F8F7-64F6-4A889B4E7183}"/>
+          </ac:inkMkLst>
+        </pc:inkChg>
+        <pc:inkChg chg="add mod">
+          <ac:chgData name="Khattab, Sherif" userId="c83b1e15-36f3-4f46-aceb-05aac24c545e" providerId="ADAL" clId="{0AF8ABA1-FB27-4DA0-9762-78B19B59A4B7}" dt="2023-09-27T18:58:09.949" v="528"/>
+          <ac:inkMkLst>
+            <pc:docMk/>
+            <pc:sldMk cId="3456616918" sldId="277"/>
+            <ac:inkMk id="21" creationId="{264E0007-F605-A5B8-1107-0B01E10A41F3}"/>
+          </ac:inkMkLst>
+        </pc:inkChg>
+        <pc:inkChg chg="add mod">
+          <ac:chgData name="Khattab, Sherif" userId="c83b1e15-36f3-4f46-aceb-05aac24c545e" providerId="ADAL" clId="{0AF8ABA1-FB27-4DA0-9762-78B19B59A4B7}" dt="2023-09-27T18:58:09.949" v="528"/>
+          <ac:inkMkLst>
+            <pc:docMk/>
+            <pc:sldMk cId="3456616918" sldId="277"/>
+            <ac:inkMk id="22" creationId="{30A2205C-71EA-919B-BABB-950FA97ED620}"/>
+          </ac:inkMkLst>
+        </pc:inkChg>
+        <pc:inkChg chg="add del mod">
+          <ac:chgData name="Khattab, Sherif" userId="c83b1e15-36f3-4f46-aceb-05aac24c545e" providerId="ADAL" clId="{0AF8ABA1-FB27-4DA0-9762-78B19B59A4B7}" dt="2023-09-27T19:14:13.981" v="769" actId="478"/>
+          <ac:inkMkLst>
+            <pc:docMk/>
+            <pc:sldMk cId="3456616918" sldId="277"/>
+            <ac:inkMk id="24" creationId="{813B066D-53F8-653A-05B4-1778B0E291AC}"/>
+          </ac:inkMkLst>
+        </pc:inkChg>
+        <pc:inkChg chg="add del mod">
+          <ac:chgData name="Khattab, Sherif" userId="c83b1e15-36f3-4f46-aceb-05aac24c545e" providerId="ADAL" clId="{0AF8ABA1-FB27-4DA0-9762-78B19B59A4B7}" dt="2023-09-27T19:14:13.981" v="769" actId="478"/>
+          <ac:inkMkLst>
+            <pc:docMk/>
+            <pc:sldMk cId="3456616918" sldId="277"/>
+            <ac:inkMk id="25" creationId="{3ADF1CD7-A703-922C-00A5-45470775FC4B}"/>
+          </ac:inkMkLst>
+        </pc:inkChg>
+        <pc:inkChg chg="add del mod">
+          <ac:chgData name="Khattab, Sherif" userId="c83b1e15-36f3-4f46-aceb-05aac24c545e" providerId="ADAL" clId="{0AF8ABA1-FB27-4DA0-9762-78B19B59A4B7}" dt="2023-09-27T19:14:19.406" v="771" actId="478"/>
+          <ac:inkMkLst>
+            <pc:docMk/>
+            <pc:sldMk cId="3456616918" sldId="277"/>
+            <ac:inkMk id="27" creationId="{7E0AAFAC-85C0-9C52-BABA-5C0CE0A4515A}"/>
+          </ac:inkMkLst>
+        </pc:inkChg>
+        <pc:inkChg chg="add del mod">
+          <ac:chgData name="Khattab, Sherif" userId="c83b1e15-36f3-4f46-aceb-05aac24c545e" providerId="ADAL" clId="{0AF8ABA1-FB27-4DA0-9762-78B19B59A4B7}" dt="2023-09-27T19:14:19.406" v="771" actId="478"/>
+          <ac:inkMkLst>
+            <pc:docMk/>
+            <pc:sldMk cId="3456616918" sldId="277"/>
+            <ac:inkMk id="28" creationId="{EE2A06F5-6083-1830-2BA2-40D3E63073AF}"/>
+          </ac:inkMkLst>
+        </pc:inkChg>
+        <pc:inkChg chg="add del mod">
+          <ac:chgData name="Khattab, Sherif" userId="c83b1e15-36f3-4f46-aceb-05aac24c545e" providerId="ADAL" clId="{0AF8ABA1-FB27-4DA0-9762-78B19B59A4B7}" dt="2023-09-27T19:14:19.406" v="771" actId="478"/>
+          <ac:inkMkLst>
+            <pc:docMk/>
+            <pc:sldMk cId="3456616918" sldId="277"/>
+            <ac:inkMk id="29" creationId="{0B7C5179-2725-26DF-4A33-178165277449}"/>
+          </ac:inkMkLst>
+        </pc:inkChg>
+        <pc:inkChg chg="add del mod">
+          <ac:chgData name="Khattab, Sherif" userId="c83b1e15-36f3-4f46-aceb-05aac24c545e" providerId="ADAL" clId="{0AF8ABA1-FB27-4DA0-9762-78B19B59A4B7}" dt="2023-09-27T19:14:19.406" v="771" actId="478"/>
+          <ac:inkMkLst>
+            <pc:docMk/>
+            <pc:sldMk cId="3456616918" sldId="277"/>
+            <ac:inkMk id="30" creationId="{9EB6039E-10A4-24D6-1C33-02BCCA1A1C29}"/>
+          </ac:inkMkLst>
+        </pc:inkChg>
+        <pc:inkChg chg="add del mod">
+          <ac:chgData name="Khattab, Sherif" userId="c83b1e15-36f3-4f46-aceb-05aac24c545e" providerId="ADAL" clId="{0AF8ABA1-FB27-4DA0-9762-78B19B59A4B7}" dt="2023-09-27T19:14:13.981" v="769" actId="478"/>
+          <ac:inkMkLst>
+            <pc:docMk/>
+            <pc:sldMk cId="3456616918" sldId="277"/>
+            <ac:inkMk id="31" creationId="{C27FEF54-B953-9073-DC5B-9AA4065F67A7}"/>
+          </ac:inkMkLst>
+        </pc:inkChg>
+        <pc:inkChg chg="add del mod">
+          <ac:chgData name="Khattab, Sherif" userId="c83b1e15-36f3-4f46-aceb-05aac24c545e" providerId="ADAL" clId="{0AF8ABA1-FB27-4DA0-9762-78B19B59A4B7}" dt="2023-09-27T19:14:13.981" v="769" actId="478"/>
+          <ac:inkMkLst>
+            <pc:docMk/>
+            <pc:sldMk cId="3456616918" sldId="277"/>
+            <ac:inkMk id="32" creationId="{B650A655-8E3E-1759-35B1-47CF7AE622EF}"/>
+          </ac:inkMkLst>
+        </pc:inkChg>
+        <pc:inkChg chg="add del mod">
+          <ac:chgData name="Khattab, Sherif" userId="c83b1e15-36f3-4f46-aceb-05aac24c545e" providerId="ADAL" clId="{0AF8ABA1-FB27-4DA0-9762-78B19B59A4B7}" dt="2023-09-27T19:14:13.981" v="769" actId="478"/>
+          <ac:inkMkLst>
+            <pc:docMk/>
+            <pc:sldMk cId="3456616918" sldId="277"/>
+            <ac:inkMk id="33" creationId="{5A00D717-C324-DE0D-E279-7A542AD072EF}"/>
+          </ac:inkMkLst>
+        </pc:inkChg>
+        <pc:inkChg chg="add del mod">
+          <ac:chgData name="Khattab, Sherif" userId="c83b1e15-36f3-4f46-aceb-05aac24c545e" providerId="ADAL" clId="{0AF8ABA1-FB27-4DA0-9762-78B19B59A4B7}" dt="2023-09-27T19:14:13.981" v="769" actId="478"/>
+          <ac:inkMkLst>
+            <pc:docMk/>
+            <pc:sldMk cId="3456616918" sldId="277"/>
+            <ac:inkMk id="34" creationId="{965D2653-47EE-6348-636A-247E6B2477A9}"/>
+          </ac:inkMkLst>
+        </pc:inkChg>
+        <pc:inkChg chg="add del mod">
+          <ac:chgData name="Khattab, Sherif" userId="c83b1e15-36f3-4f46-aceb-05aac24c545e" providerId="ADAL" clId="{0AF8ABA1-FB27-4DA0-9762-78B19B59A4B7}" dt="2023-09-27T19:14:13.981" v="769" actId="478"/>
+          <ac:inkMkLst>
+            <pc:docMk/>
+            <pc:sldMk cId="3456616918" sldId="277"/>
+            <ac:inkMk id="35" creationId="{24857799-4802-6E11-7CF7-ADD2A6B8C00F}"/>
+          </ac:inkMkLst>
+        </pc:inkChg>
+        <pc:inkChg chg="add del mod">
+          <ac:chgData name="Khattab, Sherif" userId="c83b1e15-36f3-4f46-aceb-05aac24c545e" providerId="ADAL" clId="{0AF8ABA1-FB27-4DA0-9762-78B19B59A4B7}" dt="2023-09-27T19:14:13.981" v="769" actId="478"/>
+          <ac:inkMkLst>
+            <pc:docMk/>
+            <pc:sldMk cId="3456616918" sldId="277"/>
+            <ac:inkMk id="36" creationId="{959C0AD2-0917-B2AD-BF4F-99DC43C07DD6}"/>
+          </ac:inkMkLst>
+        </pc:inkChg>
+        <pc:inkChg chg="add del mod">
+          <ac:chgData name="Khattab, Sherif" userId="c83b1e15-36f3-4f46-aceb-05aac24c545e" providerId="ADAL" clId="{0AF8ABA1-FB27-4DA0-9762-78B19B59A4B7}" dt="2023-09-27T19:14:13.981" v="769" actId="478"/>
+          <ac:inkMkLst>
+            <pc:docMk/>
+            <pc:sldMk cId="3456616918" sldId="277"/>
+            <ac:inkMk id="37" creationId="{9DFCC5F6-4CC8-F014-4265-162A454A8197}"/>
+          </ac:inkMkLst>
+        </pc:inkChg>
+        <pc:inkChg chg="add del mod">
+          <ac:chgData name="Khattab, Sherif" userId="c83b1e15-36f3-4f46-aceb-05aac24c545e" providerId="ADAL" clId="{0AF8ABA1-FB27-4DA0-9762-78B19B59A4B7}" dt="2023-09-27T19:14:13.981" v="769" actId="478"/>
+          <ac:inkMkLst>
+            <pc:docMk/>
+            <pc:sldMk cId="3456616918" sldId="277"/>
+            <ac:inkMk id="38" creationId="{9741E6D8-3B71-1225-6D14-5B39AA98C506}"/>
+          </ac:inkMkLst>
+        </pc:inkChg>
+        <pc:inkChg chg="add del mod">
+          <ac:chgData name="Khattab, Sherif" userId="c83b1e15-36f3-4f46-aceb-05aac24c545e" providerId="ADAL" clId="{0AF8ABA1-FB27-4DA0-9762-78B19B59A4B7}" dt="2023-09-27T19:14:13.981" v="769" actId="478"/>
+          <ac:inkMkLst>
+            <pc:docMk/>
+            <pc:sldMk cId="3456616918" sldId="277"/>
+            <ac:inkMk id="40" creationId="{CCA5FC43-B668-DB57-5669-F9B9065FCC71}"/>
+          </ac:inkMkLst>
+        </pc:inkChg>
+        <pc:inkChg chg="add del mod">
+          <ac:chgData name="Khattab, Sherif" userId="c83b1e15-36f3-4f46-aceb-05aac24c545e" providerId="ADAL" clId="{0AF8ABA1-FB27-4DA0-9762-78B19B59A4B7}" dt="2023-09-27T19:14:13.981" v="769" actId="478"/>
+          <ac:inkMkLst>
+            <pc:docMk/>
+            <pc:sldMk cId="3456616918" sldId="277"/>
+            <ac:inkMk id="41" creationId="{0AF8D785-16F1-C178-7C4C-9F280D248D05}"/>
+          </ac:inkMkLst>
+        </pc:inkChg>
+        <pc:inkChg chg="add del mod">
+          <ac:chgData name="Khattab, Sherif" userId="c83b1e15-36f3-4f46-aceb-05aac24c545e" providerId="ADAL" clId="{0AF8ABA1-FB27-4DA0-9762-78B19B59A4B7}" dt="2023-09-27T19:14:13.981" v="769" actId="478"/>
+          <ac:inkMkLst>
+            <pc:docMk/>
+            <pc:sldMk cId="3456616918" sldId="277"/>
+            <ac:inkMk id="42" creationId="{85DFBECF-A0E9-5160-934A-D7C4AEDCC480}"/>
+          </ac:inkMkLst>
+        </pc:inkChg>
+        <pc:inkChg chg="add del mod">
+          <ac:chgData name="Khattab, Sherif" userId="c83b1e15-36f3-4f46-aceb-05aac24c545e" providerId="ADAL" clId="{0AF8ABA1-FB27-4DA0-9762-78B19B59A4B7}" dt="2023-09-27T19:14:13.981" v="769" actId="478"/>
+          <ac:inkMkLst>
+            <pc:docMk/>
+            <pc:sldMk cId="3456616918" sldId="277"/>
+            <ac:inkMk id="43" creationId="{7330B3AE-EC9F-5609-4DF1-6B9BEDF954BE}"/>
+          </ac:inkMkLst>
+        </pc:inkChg>
+        <pc:inkChg chg="add del mod">
+          <ac:chgData name="Khattab, Sherif" userId="c83b1e15-36f3-4f46-aceb-05aac24c545e" providerId="ADAL" clId="{0AF8ABA1-FB27-4DA0-9762-78B19B59A4B7}" dt="2023-09-27T19:14:13.981" v="769" actId="478"/>
+          <ac:inkMkLst>
+            <pc:docMk/>
+            <pc:sldMk cId="3456616918" sldId="277"/>
+            <ac:inkMk id="44" creationId="{161B160B-7695-2B9C-CC33-10D95ADB2FB0}"/>
+          </ac:inkMkLst>
+        </pc:inkChg>
+        <pc:inkChg chg="add del mod">
+          <ac:chgData name="Khattab, Sherif" userId="c83b1e15-36f3-4f46-aceb-05aac24c545e" providerId="ADAL" clId="{0AF8ABA1-FB27-4DA0-9762-78B19B59A4B7}" dt="2023-09-27T19:14:13.981" v="769" actId="478"/>
+          <ac:inkMkLst>
+            <pc:docMk/>
+            <pc:sldMk cId="3456616918" sldId="277"/>
+            <ac:inkMk id="45" creationId="{1F35132A-9621-F64C-4AFC-5FC81D895167}"/>
+          </ac:inkMkLst>
+        </pc:inkChg>
+        <pc:inkChg chg="add del mod">
+          <ac:chgData name="Khattab, Sherif" userId="c83b1e15-36f3-4f46-aceb-05aac24c545e" providerId="ADAL" clId="{0AF8ABA1-FB27-4DA0-9762-78B19B59A4B7}" dt="2023-09-27T19:14:19.406" v="771" actId="478"/>
+          <ac:inkMkLst>
+            <pc:docMk/>
+            <pc:sldMk cId="3456616918" sldId="277"/>
+            <ac:inkMk id="47" creationId="{66B11549-64DA-6577-CC81-899AC261A1BD}"/>
+          </ac:inkMkLst>
+        </pc:inkChg>
+        <pc:inkChg chg="add del mod">
+          <ac:chgData name="Khattab, Sherif" userId="c83b1e15-36f3-4f46-aceb-05aac24c545e" providerId="ADAL" clId="{0AF8ABA1-FB27-4DA0-9762-78B19B59A4B7}" dt="2023-09-27T19:14:19.406" v="771" actId="478"/>
+          <ac:inkMkLst>
+            <pc:docMk/>
+            <pc:sldMk cId="3456616918" sldId="277"/>
+            <ac:inkMk id="48" creationId="{613707A6-70B1-4727-8F04-0636ED31862F}"/>
+          </ac:inkMkLst>
+        </pc:inkChg>
+        <pc:inkChg chg="add del mod">
+          <ac:chgData name="Khattab, Sherif" userId="c83b1e15-36f3-4f46-aceb-05aac24c545e" providerId="ADAL" clId="{0AF8ABA1-FB27-4DA0-9762-78B19B59A4B7}" dt="2023-09-27T19:14:19.406" v="771" actId="478"/>
+          <ac:inkMkLst>
+            <pc:docMk/>
+            <pc:sldMk cId="3456616918" sldId="277"/>
+            <ac:inkMk id="49" creationId="{ED830C5E-EB01-9F70-0CE4-C7CCE3E1C132}"/>
+          </ac:inkMkLst>
+        </pc:inkChg>
+        <pc:inkChg chg="add del mod">
+          <ac:chgData name="Khattab, Sherif" userId="c83b1e15-36f3-4f46-aceb-05aac24c545e" providerId="ADAL" clId="{0AF8ABA1-FB27-4DA0-9762-78B19B59A4B7}" dt="2023-09-27T19:14:19.406" v="771" actId="478"/>
+          <ac:inkMkLst>
+            <pc:docMk/>
+            <pc:sldMk cId="3456616918" sldId="277"/>
+            <ac:inkMk id="50" creationId="{BA164F2A-8FAC-FED1-0CC4-7F9C37D9DC58}"/>
+          </ac:inkMkLst>
+        </pc:inkChg>
+        <pc:inkChg chg="add del mod">
+          <ac:chgData name="Khattab, Sherif" userId="c83b1e15-36f3-4f46-aceb-05aac24c545e" providerId="ADAL" clId="{0AF8ABA1-FB27-4DA0-9762-78B19B59A4B7}" dt="2023-09-27T19:14:13.981" v="769" actId="478"/>
+          <ac:inkMkLst>
+            <pc:docMk/>
+            <pc:sldMk cId="3456616918" sldId="277"/>
+            <ac:inkMk id="51" creationId="{10B4E0E1-834A-6648-8AB7-FA1C707AC8F1}"/>
+          </ac:inkMkLst>
+        </pc:inkChg>
+        <pc:inkChg chg="add del mod">
+          <ac:chgData name="Khattab, Sherif" userId="c83b1e15-36f3-4f46-aceb-05aac24c545e" providerId="ADAL" clId="{0AF8ABA1-FB27-4DA0-9762-78B19B59A4B7}" dt="2023-09-27T19:14:13.981" v="769" actId="478"/>
+          <ac:inkMkLst>
+            <pc:docMk/>
+            <pc:sldMk cId="3456616918" sldId="277"/>
+            <ac:inkMk id="52" creationId="{41BDF47E-F3D6-DBAA-A073-79F170E52A37}"/>
+          </ac:inkMkLst>
+        </pc:inkChg>
+        <pc:inkChg chg="add del mod">
+          <ac:chgData name="Khattab, Sherif" userId="c83b1e15-36f3-4f46-aceb-05aac24c545e" providerId="ADAL" clId="{0AF8ABA1-FB27-4DA0-9762-78B19B59A4B7}" dt="2023-09-27T19:14:13.981" v="769" actId="478"/>
+          <ac:inkMkLst>
+            <pc:docMk/>
+            <pc:sldMk cId="3456616918" sldId="277"/>
+            <ac:inkMk id="53" creationId="{30AECED0-BD7C-CB4F-3F62-267260067415}"/>
+          </ac:inkMkLst>
+        </pc:inkChg>
+        <pc:inkChg chg="add del mod">
+          <ac:chgData name="Khattab, Sherif" userId="c83b1e15-36f3-4f46-aceb-05aac24c545e" providerId="ADAL" clId="{0AF8ABA1-FB27-4DA0-9762-78B19B59A4B7}" dt="2023-09-27T19:14:13.981" v="769" actId="478"/>
+          <ac:inkMkLst>
+            <pc:docMk/>
+            <pc:sldMk cId="3456616918" sldId="277"/>
+            <ac:inkMk id="54" creationId="{1F0BCF82-64BF-E15C-31B5-EC45CC8A9C39}"/>
+          </ac:inkMkLst>
+        </pc:inkChg>
+        <pc:inkChg chg="add del mod">
+          <ac:chgData name="Khattab, Sherif" userId="c83b1e15-36f3-4f46-aceb-05aac24c545e" providerId="ADAL" clId="{0AF8ABA1-FB27-4DA0-9762-78B19B59A4B7}" dt="2023-09-27T19:14:13.981" v="769" actId="478"/>
+          <ac:inkMkLst>
+            <pc:docMk/>
+            <pc:sldMk cId="3456616918" sldId="277"/>
+            <ac:inkMk id="55" creationId="{9E7C1438-3B15-370A-F9DD-8ABD271E437D}"/>
+          </ac:inkMkLst>
+        </pc:inkChg>
+        <pc:inkChg chg="add del mod">
+          <ac:chgData name="Khattab, Sherif" userId="c83b1e15-36f3-4f46-aceb-05aac24c545e" providerId="ADAL" clId="{0AF8ABA1-FB27-4DA0-9762-78B19B59A4B7}" dt="2023-09-27T19:14:13.981" v="769" actId="478"/>
+          <ac:inkMkLst>
+            <pc:docMk/>
+            <pc:sldMk cId="3456616918" sldId="277"/>
+            <ac:inkMk id="56" creationId="{20A234B6-E653-4FE9-8030-B32A059D4568}"/>
+          </ac:inkMkLst>
+        </pc:inkChg>
+        <pc:inkChg chg="add del mod">
+          <ac:chgData name="Khattab, Sherif" userId="c83b1e15-36f3-4f46-aceb-05aac24c545e" providerId="ADAL" clId="{0AF8ABA1-FB27-4DA0-9762-78B19B59A4B7}" dt="2023-09-27T19:14:13.981" v="769" actId="478"/>
+          <ac:inkMkLst>
+            <pc:docMk/>
+            <pc:sldMk cId="3456616918" sldId="277"/>
+            <ac:inkMk id="57" creationId="{BC3E78CE-03B9-4FC8-8D75-CA31ACCA6DB1}"/>
+          </ac:inkMkLst>
+        </pc:inkChg>
+        <pc:inkChg chg="add del mod">
+          <ac:chgData name="Khattab, Sherif" userId="c83b1e15-36f3-4f46-aceb-05aac24c545e" providerId="ADAL" clId="{0AF8ABA1-FB27-4DA0-9762-78B19B59A4B7}" dt="2023-09-27T19:14:13.981" v="769" actId="478"/>
+          <ac:inkMkLst>
+            <pc:docMk/>
+            <pc:sldMk cId="3456616918" sldId="277"/>
+            <ac:inkMk id="58" creationId="{7609DE53-302B-CD60-3E41-F2A13578A143}"/>
+          </ac:inkMkLst>
+        </pc:inkChg>
+        <pc:inkChg chg="add del mod">
+          <ac:chgData name="Khattab, Sherif" userId="c83b1e15-36f3-4f46-aceb-05aac24c545e" providerId="ADAL" clId="{0AF8ABA1-FB27-4DA0-9762-78B19B59A4B7}" dt="2023-09-27T19:14:13.981" v="769" actId="478"/>
+          <ac:inkMkLst>
+            <pc:docMk/>
+            <pc:sldMk cId="3456616918" sldId="277"/>
+            <ac:inkMk id="59" creationId="{E82917B8-1745-A5C2-20B4-19F0EA54EFFD}"/>
+          </ac:inkMkLst>
+        </pc:inkChg>
+        <pc:inkChg chg="add del mod">
+          <ac:chgData name="Khattab, Sherif" userId="c83b1e15-36f3-4f46-aceb-05aac24c545e" providerId="ADAL" clId="{0AF8ABA1-FB27-4DA0-9762-78B19B59A4B7}" dt="2023-09-27T19:14:13.981" v="769" actId="478"/>
+          <ac:inkMkLst>
+            <pc:docMk/>
+            <pc:sldMk cId="3456616918" sldId="277"/>
+            <ac:inkMk id="61" creationId="{1A04D292-EAE8-E692-16C9-CC520BD3D33E}"/>
+          </ac:inkMkLst>
+        </pc:inkChg>
+        <pc:inkChg chg="add del mod">
+          <ac:chgData name="Khattab, Sherif" userId="c83b1e15-36f3-4f46-aceb-05aac24c545e" providerId="ADAL" clId="{0AF8ABA1-FB27-4DA0-9762-78B19B59A4B7}" dt="2023-09-27T19:14:13.981" v="769" actId="478"/>
+          <ac:inkMkLst>
+            <pc:docMk/>
+            <pc:sldMk cId="3456616918" sldId="277"/>
+            <ac:inkMk id="62" creationId="{48EA2399-A8E7-A708-AF28-6830A36AB41B}"/>
+          </ac:inkMkLst>
+        </pc:inkChg>
+        <pc:inkChg chg="add del mod">
+          <ac:chgData name="Khattab, Sherif" userId="c83b1e15-36f3-4f46-aceb-05aac24c545e" providerId="ADAL" clId="{0AF8ABA1-FB27-4DA0-9762-78B19B59A4B7}" dt="2023-09-27T19:14:13.981" v="769" actId="478"/>
+          <ac:inkMkLst>
+            <pc:docMk/>
+            <pc:sldMk cId="3456616918" sldId="277"/>
+            <ac:inkMk id="63" creationId="{626E1A0E-1CC6-0A69-D356-67ED5CD34F6F}"/>
+          </ac:inkMkLst>
+        </pc:inkChg>
+        <pc:inkChg chg="add del mod">
+          <ac:chgData name="Khattab, Sherif" userId="c83b1e15-36f3-4f46-aceb-05aac24c545e" providerId="ADAL" clId="{0AF8ABA1-FB27-4DA0-9762-78B19B59A4B7}" dt="2023-09-27T19:14:13.981" v="769" actId="478"/>
+          <ac:inkMkLst>
+            <pc:docMk/>
+            <pc:sldMk cId="3456616918" sldId="277"/>
+            <ac:inkMk id="64" creationId="{2583D65F-45CD-4F58-D5DD-D0E9C63FE4D7}"/>
+          </ac:inkMkLst>
+        </pc:inkChg>
+        <pc:inkChg chg="add del mod">
+          <ac:chgData name="Khattab, Sherif" userId="c83b1e15-36f3-4f46-aceb-05aac24c545e" providerId="ADAL" clId="{0AF8ABA1-FB27-4DA0-9762-78B19B59A4B7}" dt="2023-09-27T19:14:13.981" v="769" actId="478"/>
+          <ac:inkMkLst>
+            <pc:docMk/>
+            <pc:sldMk cId="3456616918" sldId="277"/>
+            <ac:inkMk id="65" creationId="{E4ECB66B-8AE5-2CA8-E795-9922B0785CC8}"/>
+          </ac:inkMkLst>
+        </pc:inkChg>
+        <pc:inkChg chg="add del mod">
+          <ac:chgData name="Khattab, Sherif" userId="c83b1e15-36f3-4f46-aceb-05aac24c545e" providerId="ADAL" clId="{0AF8ABA1-FB27-4DA0-9762-78B19B59A4B7}" dt="2023-09-27T19:14:13.981" v="769" actId="478"/>
+          <ac:inkMkLst>
+            <pc:docMk/>
+            <pc:sldMk cId="3456616918" sldId="277"/>
+            <ac:inkMk id="66" creationId="{006754AF-7E1F-5860-46AA-26D244C826D8}"/>
+          </ac:inkMkLst>
+        </pc:inkChg>
+        <pc:inkChg chg="add del mod">
+          <ac:chgData name="Khattab, Sherif" userId="c83b1e15-36f3-4f46-aceb-05aac24c545e" providerId="ADAL" clId="{0AF8ABA1-FB27-4DA0-9762-78B19B59A4B7}" dt="2023-09-27T19:14:19.406" v="771" actId="478"/>
+          <ac:inkMkLst>
+            <pc:docMk/>
+            <pc:sldMk cId="3456616918" sldId="277"/>
+            <ac:inkMk id="68" creationId="{FCEAAB21-C712-61FC-2481-AA9C5D934D9A}"/>
+          </ac:inkMkLst>
+        </pc:inkChg>
+        <pc:inkChg chg="add del mod">
+          <ac:chgData name="Khattab, Sherif" userId="c83b1e15-36f3-4f46-aceb-05aac24c545e" providerId="ADAL" clId="{0AF8ABA1-FB27-4DA0-9762-78B19B59A4B7}" dt="2023-09-27T19:14:13.981" v="769" actId="478"/>
+          <ac:inkMkLst>
+            <pc:docMk/>
+            <pc:sldMk cId="3456616918" sldId="277"/>
+            <ac:inkMk id="69" creationId="{2DC5B6A9-9ED5-2AF9-8B74-21E71CC47243}"/>
+          </ac:inkMkLst>
+        </pc:inkChg>
+        <pc:inkChg chg="add del mod">
+          <ac:chgData name="Khattab, Sherif" userId="c83b1e15-36f3-4f46-aceb-05aac24c545e" providerId="ADAL" clId="{0AF8ABA1-FB27-4DA0-9762-78B19B59A4B7}" dt="2023-09-27T19:14:13.981" v="769" actId="478"/>
+          <ac:inkMkLst>
+            <pc:docMk/>
+            <pc:sldMk cId="3456616918" sldId="277"/>
+            <ac:inkMk id="70" creationId="{B8320ECA-60AF-636E-8AE8-9B268460E0A9}"/>
+          </ac:inkMkLst>
+        </pc:inkChg>
+        <pc:inkChg chg="add del mod">
+          <ac:chgData name="Khattab, Sherif" userId="c83b1e15-36f3-4f46-aceb-05aac24c545e" providerId="ADAL" clId="{0AF8ABA1-FB27-4DA0-9762-78B19B59A4B7}" dt="2023-09-27T19:14:13.981" v="769" actId="478"/>
+          <ac:inkMkLst>
+            <pc:docMk/>
+            <pc:sldMk cId="3456616918" sldId="277"/>
+            <ac:inkMk id="71" creationId="{1403EA21-7480-1AC1-3F2F-44BF31A4B774}"/>
+          </ac:inkMkLst>
+        </pc:inkChg>
+        <pc:inkChg chg="add del mod">
+          <ac:chgData name="Khattab, Sherif" userId="c83b1e15-36f3-4f46-aceb-05aac24c545e" providerId="ADAL" clId="{0AF8ABA1-FB27-4DA0-9762-78B19B59A4B7}" dt="2023-09-27T19:14:13.981" v="769" actId="478"/>
+          <ac:inkMkLst>
+            <pc:docMk/>
+            <pc:sldMk cId="3456616918" sldId="277"/>
+            <ac:inkMk id="72" creationId="{AA8E0203-BBCC-E512-7395-C78E1D2B5D53}"/>
+          </ac:inkMkLst>
+        </pc:inkChg>
+        <pc:inkChg chg="add del mod">
+          <ac:chgData name="Khattab, Sherif" userId="c83b1e15-36f3-4f46-aceb-05aac24c545e" providerId="ADAL" clId="{0AF8ABA1-FB27-4DA0-9762-78B19B59A4B7}" dt="2023-09-27T19:14:13.981" v="769" actId="478"/>
+          <ac:inkMkLst>
+            <pc:docMk/>
+            <pc:sldMk cId="3456616918" sldId="277"/>
+            <ac:inkMk id="73" creationId="{C54E4F25-8627-F227-3155-535820FEA78A}"/>
+          </ac:inkMkLst>
+        </pc:inkChg>
+        <pc:inkChg chg="add del mod">
+          <ac:chgData name="Khattab, Sherif" userId="c83b1e15-36f3-4f46-aceb-05aac24c545e" providerId="ADAL" clId="{0AF8ABA1-FB27-4DA0-9762-78B19B59A4B7}" dt="2023-09-27T19:14:13.981" v="769" actId="478"/>
+          <ac:inkMkLst>
+            <pc:docMk/>
+            <pc:sldMk cId="3456616918" sldId="277"/>
+            <ac:inkMk id="74" creationId="{68365252-F29F-630B-5595-D36E1AE876A3}"/>
+          </ac:inkMkLst>
+        </pc:inkChg>
+        <pc:inkChg chg="add del mod">
+          <ac:chgData name="Khattab, Sherif" userId="c83b1e15-36f3-4f46-aceb-05aac24c545e" providerId="ADAL" clId="{0AF8ABA1-FB27-4DA0-9762-78B19B59A4B7}" dt="2023-09-27T19:14:13.981" v="769" actId="478"/>
+          <ac:inkMkLst>
+            <pc:docMk/>
+            <pc:sldMk cId="3456616918" sldId="277"/>
+            <ac:inkMk id="75" creationId="{FD185424-48D1-4C20-5707-8AD21099D8C1}"/>
+          </ac:inkMkLst>
+        </pc:inkChg>
+        <pc:inkChg chg="add del mod">
+          <ac:chgData name="Khattab, Sherif" userId="c83b1e15-36f3-4f46-aceb-05aac24c545e" providerId="ADAL" clId="{0AF8ABA1-FB27-4DA0-9762-78B19B59A4B7}" dt="2023-09-27T19:14:13.981" v="769" actId="478"/>
+          <ac:inkMkLst>
+            <pc:docMk/>
+            <pc:sldMk cId="3456616918" sldId="277"/>
+            <ac:inkMk id="76" creationId="{3AC93B94-3C18-1E74-8E9B-3B93B80498A8}"/>
+          </ac:inkMkLst>
+        </pc:inkChg>
+        <pc:inkChg chg="add del mod">
+          <ac:chgData name="Khattab, Sherif" userId="c83b1e15-36f3-4f46-aceb-05aac24c545e" providerId="ADAL" clId="{0AF8ABA1-FB27-4DA0-9762-78B19B59A4B7}" dt="2023-09-27T19:14:13.981" v="769" actId="478"/>
+          <ac:inkMkLst>
+            <pc:docMk/>
+            <pc:sldMk cId="3456616918" sldId="277"/>
+            <ac:inkMk id="77" creationId="{CAD3119D-0C90-9765-4E2F-B4CE1A078B06}"/>
+          </ac:inkMkLst>
+        </pc:inkChg>
+        <pc:inkChg chg="add del mod">
+          <ac:chgData name="Khattab, Sherif" userId="c83b1e15-36f3-4f46-aceb-05aac24c545e" providerId="ADAL" clId="{0AF8ABA1-FB27-4DA0-9762-78B19B59A4B7}" dt="2023-09-27T19:14:13.981" v="769" actId="478"/>
+          <ac:inkMkLst>
+            <pc:docMk/>
+            <pc:sldMk cId="3456616918" sldId="277"/>
+            <ac:inkMk id="78" creationId="{1AE0996E-300A-3B3D-89F2-A59A43D70F5E}"/>
+          </ac:inkMkLst>
+        </pc:inkChg>
+        <pc:inkChg chg="add del mod">
+          <ac:chgData name="Khattab, Sherif" userId="c83b1e15-36f3-4f46-aceb-05aac24c545e" providerId="ADAL" clId="{0AF8ABA1-FB27-4DA0-9762-78B19B59A4B7}" dt="2023-09-27T19:14:13.981" v="769" actId="478"/>
+          <ac:inkMkLst>
+            <pc:docMk/>
+            <pc:sldMk cId="3456616918" sldId="277"/>
+            <ac:inkMk id="79" creationId="{63CCF6F6-28C0-2A85-C0D7-3A49B235F8BA}"/>
+          </ac:inkMkLst>
+        </pc:inkChg>
+        <pc:inkChg chg="add del mod">
+          <ac:chgData name="Khattab, Sherif" userId="c83b1e15-36f3-4f46-aceb-05aac24c545e" providerId="ADAL" clId="{0AF8ABA1-FB27-4DA0-9762-78B19B59A4B7}" dt="2023-09-27T19:14:13.981" v="769" actId="478"/>
+          <ac:inkMkLst>
+            <pc:docMk/>
+            <pc:sldMk cId="3456616918" sldId="277"/>
+            <ac:inkMk id="80" creationId="{DB3ACDF9-67F6-8EBE-88A3-7F531A108277}"/>
+          </ac:inkMkLst>
+        </pc:inkChg>
+        <pc:inkChg chg="add del mod">
+          <ac:chgData name="Khattab, Sherif" userId="c83b1e15-36f3-4f46-aceb-05aac24c545e" providerId="ADAL" clId="{0AF8ABA1-FB27-4DA0-9762-78B19B59A4B7}" dt="2023-09-27T19:14:17.235" v="770" actId="478"/>
+          <ac:inkMkLst>
+            <pc:docMk/>
+            <pc:sldMk cId="3456616918" sldId="277"/>
+            <ac:inkMk id="82" creationId="{E88CFACE-3628-8445-CDF5-34043427069C}"/>
+          </ac:inkMkLst>
+        </pc:inkChg>
+        <pc:inkChg chg="add del mod">
+          <ac:chgData name="Khattab, Sherif" userId="c83b1e15-36f3-4f46-aceb-05aac24c545e" providerId="ADAL" clId="{0AF8ABA1-FB27-4DA0-9762-78B19B59A4B7}" dt="2023-09-27T19:14:17.235" v="770" actId="478"/>
+          <ac:inkMkLst>
+            <pc:docMk/>
+            <pc:sldMk cId="3456616918" sldId="277"/>
+            <ac:inkMk id="83" creationId="{96A8AB62-0E8E-126D-8816-D50DCB0FCABE}"/>
+          </ac:inkMkLst>
+        </pc:inkChg>
+        <pc:inkChg chg="add del mod">
+          <ac:chgData name="Khattab, Sherif" userId="c83b1e15-36f3-4f46-aceb-05aac24c545e" providerId="ADAL" clId="{0AF8ABA1-FB27-4DA0-9762-78B19B59A4B7}" dt="2023-09-27T19:14:17.235" v="770" actId="478"/>
+          <ac:inkMkLst>
+            <pc:docMk/>
+            <pc:sldMk cId="3456616918" sldId="277"/>
+            <ac:inkMk id="84" creationId="{A2CE8FF5-0C03-2D3E-E809-25B3D38A0F6D}"/>
+          </ac:inkMkLst>
+        </pc:inkChg>
+        <pc:inkChg chg="add del mod">
+          <ac:chgData name="Khattab, Sherif" userId="c83b1e15-36f3-4f46-aceb-05aac24c545e" providerId="ADAL" clId="{0AF8ABA1-FB27-4DA0-9762-78B19B59A4B7}" dt="2023-09-27T19:14:17.235" v="770" actId="478"/>
+          <ac:inkMkLst>
+            <pc:docMk/>
+            <pc:sldMk cId="3456616918" sldId="277"/>
+            <ac:inkMk id="85" creationId="{C27484F3-D254-8B71-82DC-E1B0CF60B668}"/>
+          </ac:inkMkLst>
+        </pc:inkChg>
+        <pc:inkChg chg="add del mod">
+          <ac:chgData name="Khattab, Sherif" userId="c83b1e15-36f3-4f46-aceb-05aac24c545e" providerId="ADAL" clId="{0AF8ABA1-FB27-4DA0-9762-78B19B59A4B7}" dt="2023-09-27T19:14:17.235" v="770" actId="478"/>
+          <ac:inkMkLst>
+            <pc:docMk/>
+            <pc:sldMk cId="3456616918" sldId="277"/>
+            <ac:inkMk id="86" creationId="{46287050-7378-E63C-082A-11DCB40DE34D}"/>
+          </ac:inkMkLst>
+        </pc:inkChg>
+        <pc:inkChg chg="add del mod">
+          <ac:chgData name="Khattab, Sherif" userId="c83b1e15-36f3-4f46-aceb-05aac24c545e" providerId="ADAL" clId="{0AF8ABA1-FB27-4DA0-9762-78B19B59A4B7}" dt="2023-09-27T19:14:19.406" v="771" actId="478"/>
+          <ac:inkMkLst>
+            <pc:docMk/>
+            <pc:sldMk cId="3456616918" sldId="277"/>
+            <ac:inkMk id="87" creationId="{A16C51BD-625A-3E57-9DA0-3037A2538DE5}"/>
+          </ac:inkMkLst>
+        </pc:inkChg>
+        <pc:inkChg chg="add del mod">
+          <ac:chgData name="Khattab, Sherif" userId="c83b1e15-36f3-4f46-aceb-05aac24c545e" providerId="ADAL" clId="{0AF8ABA1-FB27-4DA0-9762-78B19B59A4B7}" dt="2023-09-27T19:14:17.235" v="770" actId="478"/>
+          <ac:inkMkLst>
+            <pc:docMk/>
+            <pc:sldMk cId="3456616918" sldId="277"/>
+            <ac:inkMk id="90" creationId="{205B005B-7FA9-F8D0-8747-10513E924499}"/>
+          </ac:inkMkLst>
+        </pc:inkChg>
+        <pc:inkChg chg="add del mod">
+          <ac:chgData name="Khattab, Sherif" userId="c83b1e15-36f3-4f46-aceb-05aac24c545e" providerId="ADAL" clId="{0AF8ABA1-FB27-4DA0-9762-78B19B59A4B7}" dt="2023-09-27T19:14:17.235" v="770" actId="478"/>
+          <ac:inkMkLst>
+            <pc:docMk/>
+            <pc:sldMk cId="3456616918" sldId="277"/>
+            <ac:inkMk id="91" creationId="{575F5C78-268A-7A1B-EF71-5B7299BEF34A}"/>
+          </ac:inkMkLst>
+        </pc:inkChg>
+        <pc:inkChg chg="add del mod">
+          <ac:chgData name="Khattab, Sherif" userId="c83b1e15-36f3-4f46-aceb-05aac24c545e" providerId="ADAL" clId="{0AF8ABA1-FB27-4DA0-9762-78B19B59A4B7}" dt="2023-09-27T19:14:19.406" v="771" actId="478"/>
+          <ac:inkMkLst>
+            <pc:docMk/>
+            <pc:sldMk cId="3456616918" sldId="277"/>
+            <ac:inkMk id="92" creationId="{DD41C389-506F-95A2-31C7-FB4224D5B029}"/>
+          </ac:inkMkLst>
+        </pc:inkChg>
+        <pc:inkChg chg="add del mod">
+          <ac:chgData name="Khattab, Sherif" userId="c83b1e15-36f3-4f46-aceb-05aac24c545e" providerId="ADAL" clId="{0AF8ABA1-FB27-4DA0-9762-78B19B59A4B7}" dt="2023-09-27T19:14:13.981" v="769" actId="478"/>
+          <ac:inkMkLst>
+            <pc:docMk/>
+            <pc:sldMk cId="3456616918" sldId="277"/>
+            <ac:inkMk id="93" creationId="{F3C3AF0D-D4BC-F208-2018-00F0795040C3}"/>
+          </ac:inkMkLst>
+        </pc:inkChg>
+        <pc:inkChg chg="add del mod">
+          <ac:chgData name="Khattab, Sherif" userId="c83b1e15-36f3-4f46-aceb-05aac24c545e" providerId="ADAL" clId="{0AF8ABA1-FB27-4DA0-9762-78B19B59A4B7}" dt="2023-09-27T19:14:13.981" v="769" actId="478"/>
+          <ac:inkMkLst>
+            <pc:docMk/>
+            <pc:sldMk cId="3456616918" sldId="277"/>
+            <ac:inkMk id="94" creationId="{1821B770-C24D-56DF-178C-5CA5CE866D15}"/>
+          </ac:inkMkLst>
+        </pc:inkChg>
+        <pc:inkChg chg="add del mod">
+          <ac:chgData name="Khattab, Sherif" userId="c83b1e15-36f3-4f46-aceb-05aac24c545e" providerId="ADAL" clId="{0AF8ABA1-FB27-4DA0-9762-78B19B59A4B7}" dt="2023-09-27T19:14:13.981" v="769" actId="478"/>
+          <ac:inkMkLst>
+            <pc:docMk/>
+            <pc:sldMk cId="3456616918" sldId="277"/>
+            <ac:inkMk id="95" creationId="{298AA678-21B1-6001-C310-DE6047C39FD9}"/>
+          </ac:inkMkLst>
+        </pc:inkChg>
+        <pc:inkChg chg="add del mod">
+          <ac:chgData name="Khattab, Sherif" userId="c83b1e15-36f3-4f46-aceb-05aac24c545e" providerId="ADAL" clId="{0AF8ABA1-FB27-4DA0-9762-78B19B59A4B7}" dt="2023-09-27T19:14:13.981" v="769" actId="478"/>
+          <ac:inkMkLst>
+            <pc:docMk/>
+            <pc:sldMk cId="3456616918" sldId="277"/>
+            <ac:inkMk id="96" creationId="{C4521D40-869A-5FAC-DAAB-F2D5AA3B3F35}"/>
+          </ac:inkMkLst>
+        </pc:inkChg>
+        <pc:inkChg chg="add del mod">
+          <ac:chgData name="Khattab, Sherif" userId="c83b1e15-36f3-4f46-aceb-05aac24c545e" providerId="ADAL" clId="{0AF8ABA1-FB27-4DA0-9762-78B19B59A4B7}" dt="2023-09-27T19:14:13.981" v="769" actId="478"/>
+          <ac:inkMkLst>
+            <pc:docMk/>
+            <pc:sldMk cId="3456616918" sldId="277"/>
+            <ac:inkMk id="97" creationId="{E9C484CE-3A7D-0FCC-A0BB-E2D6DC6D5A60}"/>
+          </ac:inkMkLst>
+        </pc:inkChg>
+        <pc:inkChg chg="add del mod">
+          <ac:chgData name="Khattab, Sherif" userId="c83b1e15-36f3-4f46-aceb-05aac24c545e" providerId="ADAL" clId="{0AF8ABA1-FB27-4DA0-9762-78B19B59A4B7}" dt="2023-09-27T19:14:13.981" v="769" actId="478"/>
+          <ac:inkMkLst>
+            <pc:docMk/>
+            <pc:sldMk cId="3456616918" sldId="277"/>
+            <ac:inkMk id="98" creationId="{BB1789E5-4C89-329E-25F7-83D7F94B8E74}"/>
+          </ac:inkMkLst>
+        </pc:inkChg>
+        <pc:inkChg chg="add del mod">
+          <ac:chgData name="Khattab, Sherif" userId="c83b1e15-36f3-4f46-aceb-05aac24c545e" providerId="ADAL" clId="{0AF8ABA1-FB27-4DA0-9762-78B19B59A4B7}" dt="2023-09-27T19:14:19.406" v="771" actId="478"/>
+          <ac:inkMkLst>
+            <pc:docMk/>
+            <pc:sldMk cId="3456616918" sldId="277"/>
+            <ac:inkMk id="99" creationId="{B1417704-46BC-BA8A-192A-9A40222DB2BB}"/>
+          </ac:inkMkLst>
+        </pc:inkChg>
+        <pc:inkChg chg="add del mod">
+          <ac:chgData name="Khattab, Sherif" userId="c83b1e15-36f3-4f46-aceb-05aac24c545e" providerId="ADAL" clId="{0AF8ABA1-FB27-4DA0-9762-78B19B59A4B7}" dt="2023-09-27T19:14:19.406" v="771" actId="478"/>
+          <ac:inkMkLst>
+            <pc:docMk/>
+            <pc:sldMk cId="3456616918" sldId="277"/>
+            <ac:inkMk id="100" creationId="{007C6072-8A6A-7688-1819-35F85AD0CA3D}"/>
+          </ac:inkMkLst>
+        </pc:inkChg>
+        <pc:inkChg chg="add del mod">
+          <ac:chgData name="Khattab, Sherif" userId="c83b1e15-36f3-4f46-aceb-05aac24c545e" providerId="ADAL" clId="{0AF8ABA1-FB27-4DA0-9762-78B19B59A4B7}" dt="2023-09-27T19:14:13.981" v="769" actId="478"/>
+          <ac:inkMkLst>
+            <pc:docMk/>
+            <pc:sldMk cId="3456616918" sldId="277"/>
+            <ac:inkMk id="101" creationId="{39E95DAB-8576-34F7-A0B7-5DDD452331EF}"/>
+          </ac:inkMkLst>
+        </pc:inkChg>
+        <pc:inkChg chg="add del mod">
+          <ac:chgData name="Khattab, Sherif" userId="c83b1e15-36f3-4f46-aceb-05aac24c545e" providerId="ADAL" clId="{0AF8ABA1-FB27-4DA0-9762-78B19B59A4B7}" dt="2023-09-27T19:14:13.981" v="769" actId="478"/>
+          <ac:inkMkLst>
+            <pc:docMk/>
+            <pc:sldMk cId="3456616918" sldId="277"/>
+            <ac:inkMk id="102" creationId="{65794618-D4A9-33F5-ECB8-4387DB3F6CA0}"/>
+          </ac:inkMkLst>
+        </pc:inkChg>
+        <pc:inkChg chg="add del mod">
+          <ac:chgData name="Khattab, Sherif" userId="c83b1e15-36f3-4f46-aceb-05aac24c545e" providerId="ADAL" clId="{0AF8ABA1-FB27-4DA0-9762-78B19B59A4B7}" dt="2023-09-27T19:14:13.981" v="769" actId="478"/>
+          <ac:inkMkLst>
+            <pc:docMk/>
+            <pc:sldMk cId="3456616918" sldId="277"/>
+            <ac:inkMk id="103" creationId="{E3DF5443-E8DB-C7D8-7B25-9255986AFE2E}"/>
+          </ac:inkMkLst>
+        </pc:inkChg>
+        <pc:inkChg chg="add del mod">
+          <ac:chgData name="Khattab, Sherif" userId="c83b1e15-36f3-4f46-aceb-05aac24c545e" providerId="ADAL" clId="{0AF8ABA1-FB27-4DA0-9762-78B19B59A4B7}" dt="2023-09-27T19:14:13.981" v="769" actId="478"/>
+          <ac:inkMkLst>
+            <pc:docMk/>
+            <pc:sldMk cId="3456616918" sldId="277"/>
+            <ac:inkMk id="104" creationId="{558C5DD6-3520-6058-A3E8-20FE87A67882}"/>
+          </ac:inkMkLst>
+        </pc:inkChg>
+        <pc:inkChg chg="add del mod">
+          <ac:chgData name="Khattab, Sherif" userId="c83b1e15-36f3-4f46-aceb-05aac24c545e" providerId="ADAL" clId="{0AF8ABA1-FB27-4DA0-9762-78B19B59A4B7}" dt="2023-09-27T18:54:01.729" v="411" actId="9405"/>
+          <ac:inkMkLst>
+            <pc:docMk/>
+            <pc:sldMk cId="3456616918" sldId="277"/>
+            <ac:inkMk id="105" creationId="{50F08FE4-C8FC-AAE0-4EB2-123DC6F41BA8}"/>
+          </ac:inkMkLst>
+        </pc:inkChg>
+        <pc:inkChg chg="add del mod">
+          <ac:chgData name="Khattab, Sherif" userId="c83b1e15-36f3-4f46-aceb-05aac24c545e" providerId="ADAL" clId="{0AF8ABA1-FB27-4DA0-9762-78B19B59A4B7}" dt="2023-09-27T18:54:01.368" v="410" actId="9405"/>
+          <ac:inkMkLst>
+            <pc:docMk/>
+            <pc:sldMk cId="3456616918" sldId="277"/>
+            <ac:inkMk id="106" creationId="{7C04A6DC-4B16-A919-9A7E-15D311E8AB17}"/>
+          </ac:inkMkLst>
+        </pc:inkChg>
+        <pc:inkChg chg="add del mod">
+          <ac:chgData name="Khattab, Sherif" userId="c83b1e15-36f3-4f46-aceb-05aac24c545e" providerId="ADAL" clId="{0AF8ABA1-FB27-4DA0-9762-78B19B59A4B7}" dt="2023-09-27T18:54:00.542" v="409" actId="9405"/>
+          <ac:inkMkLst>
+            <pc:docMk/>
+            <pc:sldMk cId="3456616918" sldId="277"/>
+            <ac:inkMk id="107" creationId="{992B1B4F-2578-F9E7-21B8-D7F86DE66DE9}"/>
+          </ac:inkMkLst>
+        </pc:inkChg>
+        <pc:inkChg chg="add del mod">
+          <ac:chgData name="Khattab, Sherif" userId="c83b1e15-36f3-4f46-aceb-05aac24c545e" providerId="ADAL" clId="{0AF8ABA1-FB27-4DA0-9762-78B19B59A4B7}" dt="2023-09-27T18:54:00.163" v="408" actId="9405"/>
+          <ac:inkMkLst>
+            <pc:docMk/>
+            <pc:sldMk cId="3456616918" sldId="277"/>
+            <ac:inkMk id="108" creationId="{3F1C11F2-7EBB-771B-0313-C633ED88E448}"/>
+          </ac:inkMkLst>
+        </pc:inkChg>
+        <pc:inkChg chg="add del mod">
+          <ac:chgData name="Khattab, Sherif" userId="c83b1e15-36f3-4f46-aceb-05aac24c545e" providerId="ADAL" clId="{0AF8ABA1-FB27-4DA0-9762-78B19B59A4B7}" dt="2023-09-27T18:53:59.808" v="407" actId="9405"/>
+          <ac:inkMkLst>
+            <pc:docMk/>
+            <pc:sldMk cId="3456616918" sldId="277"/>
+            <ac:inkMk id="109" creationId="{3A4C5D97-65BB-16DD-FE72-A1A1E152925A}"/>
+          </ac:inkMkLst>
+        </pc:inkChg>
+        <pc:inkChg chg="add del mod">
+          <ac:chgData name="Khattab, Sherif" userId="c83b1e15-36f3-4f46-aceb-05aac24c545e" providerId="ADAL" clId="{0AF8ABA1-FB27-4DA0-9762-78B19B59A4B7}" dt="2023-09-27T18:53:58.615" v="406"/>
+          <ac:inkMkLst>
+            <pc:docMk/>
+            <pc:sldMk cId="3456616918" sldId="277"/>
+            <ac:inkMk id="110" creationId="{A901F397-A0C0-BDC1-0846-332D2AEF43A7}"/>
+          </ac:inkMkLst>
+        </pc:inkChg>
+        <pc:inkChg chg="add del mod">
+          <ac:chgData name="Khattab, Sherif" userId="c83b1e15-36f3-4f46-aceb-05aac24c545e" providerId="ADAL" clId="{0AF8ABA1-FB27-4DA0-9762-78B19B59A4B7}" dt="2023-09-27T18:53:58.236" v="404"/>
+          <ac:inkMkLst>
+            <pc:docMk/>
+            <pc:sldMk cId="3456616918" sldId="277"/>
+            <ac:inkMk id="112" creationId="{3E6129FF-8CC3-8C7E-2698-DAE21BF0A185}"/>
+          </ac:inkMkLst>
+        </pc:inkChg>
+        <pc:inkChg chg="add del mod">
+          <ac:chgData name="Khattab, Sherif" userId="c83b1e15-36f3-4f46-aceb-05aac24c545e" providerId="ADAL" clId="{0AF8ABA1-FB27-4DA0-9762-78B19B59A4B7}" dt="2023-09-27T19:14:13.981" v="769" actId="478"/>
+          <ac:inkMkLst>
+            <pc:docMk/>
+            <pc:sldMk cId="3456616918" sldId="277"/>
+            <ac:inkMk id="114" creationId="{104F06AC-6FBB-2D2F-5580-0A6BF7E8CBA1}"/>
+          </ac:inkMkLst>
+        </pc:inkChg>
+        <pc:inkChg chg="add del mod">
+          <ac:chgData name="Khattab, Sherif" userId="c83b1e15-36f3-4f46-aceb-05aac24c545e" providerId="ADAL" clId="{0AF8ABA1-FB27-4DA0-9762-78B19B59A4B7}" dt="2023-09-27T19:14:13.981" v="769" actId="478"/>
+          <ac:inkMkLst>
+            <pc:docMk/>
+            <pc:sldMk cId="3456616918" sldId="277"/>
+            <ac:inkMk id="115" creationId="{7448C800-4EB7-04A6-F286-7121FDEC52B7}"/>
+          </ac:inkMkLst>
+        </pc:inkChg>
+        <pc:inkChg chg="add del mod">
+          <ac:chgData name="Khattab, Sherif" userId="c83b1e15-36f3-4f46-aceb-05aac24c545e" providerId="ADAL" clId="{0AF8ABA1-FB27-4DA0-9762-78B19B59A4B7}" dt="2023-09-27T19:14:13.981" v="769" actId="478"/>
+          <ac:inkMkLst>
+            <pc:docMk/>
+            <pc:sldMk cId="3456616918" sldId="277"/>
+            <ac:inkMk id="116" creationId="{1B7B7413-DB05-FEED-4929-D32E748019DB}"/>
+          </ac:inkMkLst>
+        </pc:inkChg>
+        <pc:inkChg chg="add del mod">
+          <ac:chgData name="Khattab, Sherif" userId="c83b1e15-36f3-4f46-aceb-05aac24c545e" providerId="ADAL" clId="{0AF8ABA1-FB27-4DA0-9762-78B19B59A4B7}" dt="2023-09-27T19:14:13.981" v="769" actId="478"/>
+          <ac:inkMkLst>
+            <pc:docMk/>
+            <pc:sldMk cId="3456616918" sldId="277"/>
+            <ac:inkMk id="117" creationId="{87B997AC-A9DC-A799-C3C0-925B67A0B4A2}"/>
+          </ac:inkMkLst>
+        </pc:inkChg>
+        <pc:inkChg chg="add del">
+          <ac:chgData name="Khattab, Sherif" userId="c83b1e15-36f3-4f46-aceb-05aac24c545e" providerId="ADAL" clId="{0AF8ABA1-FB27-4DA0-9762-78B19B59A4B7}" dt="2023-09-27T18:54:04.823" v="417" actId="9405"/>
+          <ac:inkMkLst>
+            <pc:docMk/>
+            <pc:sldMk cId="3456616918" sldId="277"/>
+            <ac:inkMk id="118" creationId="{3A96E101-22B4-A69E-4D9A-597F458AA0CE}"/>
+          </ac:inkMkLst>
+        </pc:inkChg>
+        <pc:inkChg chg="add del mod">
+          <ac:chgData name="Khattab, Sherif" userId="c83b1e15-36f3-4f46-aceb-05aac24c545e" providerId="ADAL" clId="{0AF8ABA1-FB27-4DA0-9762-78B19B59A4B7}" dt="2023-09-27T19:14:13.981" v="769" actId="478"/>
+          <ac:inkMkLst>
+            <pc:docMk/>
+            <pc:sldMk cId="3456616918" sldId="277"/>
+            <ac:inkMk id="120" creationId="{1E3791CD-0E17-7499-D7C9-5C259E635F43}"/>
+          </ac:inkMkLst>
+        </pc:inkChg>
+        <pc:inkChg chg="add del mod">
+          <ac:chgData name="Khattab, Sherif" userId="c83b1e15-36f3-4f46-aceb-05aac24c545e" providerId="ADAL" clId="{0AF8ABA1-FB27-4DA0-9762-78B19B59A4B7}" dt="2023-09-27T19:14:13.981" v="769" actId="478"/>
+          <ac:inkMkLst>
+            <pc:docMk/>
+            <pc:sldMk cId="3456616918" sldId="277"/>
+            <ac:inkMk id="121" creationId="{674E4F76-BBB6-E071-BB7B-9E6445DA9937}"/>
+          </ac:inkMkLst>
+        </pc:inkChg>
+        <pc:inkChg chg="add del mod">
+          <ac:chgData name="Khattab, Sherif" userId="c83b1e15-36f3-4f46-aceb-05aac24c545e" providerId="ADAL" clId="{0AF8ABA1-FB27-4DA0-9762-78B19B59A4B7}" dt="2023-09-27T19:14:13.981" v="769" actId="478"/>
+          <ac:inkMkLst>
+            <pc:docMk/>
+            <pc:sldMk cId="3456616918" sldId="277"/>
+            <ac:inkMk id="122" creationId="{98D1BB0D-7186-A2DC-340D-93B95A189F05}"/>
+          </ac:inkMkLst>
+        </pc:inkChg>
+        <pc:inkChg chg="add del mod">
+          <ac:chgData name="Khattab, Sherif" userId="c83b1e15-36f3-4f46-aceb-05aac24c545e" providerId="ADAL" clId="{0AF8ABA1-FB27-4DA0-9762-78B19B59A4B7}" dt="2023-09-27T19:14:13.981" v="769" actId="478"/>
+          <ac:inkMkLst>
+            <pc:docMk/>
+            <pc:sldMk cId="3456616918" sldId="277"/>
+            <ac:inkMk id="123" creationId="{8B5C115A-DAF5-48F8-FE6C-771DB1A54BE6}"/>
+          </ac:inkMkLst>
+        </pc:inkChg>
+        <pc:inkChg chg="add del mod">
+          <ac:chgData name="Khattab, Sherif" userId="c83b1e15-36f3-4f46-aceb-05aac24c545e" providerId="ADAL" clId="{0AF8ABA1-FB27-4DA0-9762-78B19B59A4B7}" dt="2023-09-27T19:14:13.981" v="769" actId="478"/>
+          <ac:inkMkLst>
+            <pc:docMk/>
+            <pc:sldMk cId="3456616918" sldId="277"/>
+            <ac:inkMk id="124" creationId="{C5BF0205-AEB1-8DD3-F8D7-71CC0C492A57}"/>
+          </ac:inkMkLst>
+        </pc:inkChg>
+        <pc:inkChg chg="add del mod">
+          <ac:chgData name="Khattab, Sherif" userId="c83b1e15-36f3-4f46-aceb-05aac24c545e" providerId="ADAL" clId="{0AF8ABA1-FB27-4DA0-9762-78B19B59A4B7}" dt="2023-09-27T19:14:13.981" v="769" actId="478"/>
+          <ac:inkMkLst>
+            <pc:docMk/>
+            <pc:sldMk cId="3456616918" sldId="277"/>
+            <ac:inkMk id="125" creationId="{8DDD65CC-2E0F-2A2F-699E-6EE6AB96C629}"/>
+          </ac:inkMkLst>
+        </pc:inkChg>
+        <pc:inkChg chg="add del mod">
+          <ac:chgData name="Khattab, Sherif" userId="c83b1e15-36f3-4f46-aceb-05aac24c545e" providerId="ADAL" clId="{0AF8ABA1-FB27-4DA0-9762-78B19B59A4B7}" dt="2023-09-27T19:14:13.981" v="769" actId="478"/>
+          <ac:inkMkLst>
+            <pc:docMk/>
+            <pc:sldMk cId="3456616918" sldId="277"/>
+            <ac:inkMk id="127" creationId="{09F49F93-DC73-FCF3-EC92-47BB9B51C8EE}"/>
+          </ac:inkMkLst>
+        </pc:inkChg>
+        <pc:inkChg chg="add del mod">
+          <ac:chgData name="Khattab, Sherif" userId="c83b1e15-36f3-4f46-aceb-05aac24c545e" providerId="ADAL" clId="{0AF8ABA1-FB27-4DA0-9762-78B19B59A4B7}" dt="2023-09-27T19:14:13.981" v="769" actId="478"/>
+          <ac:inkMkLst>
+            <pc:docMk/>
+            <pc:sldMk cId="3456616918" sldId="277"/>
+            <ac:inkMk id="128" creationId="{1F258E2C-7AEB-8FE7-31D2-D9C4BC853556}"/>
+          </ac:inkMkLst>
+        </pc:inkChg>
+        <pc:inkChg chg="add del mod">
+          <ac:chgData name="Khattab, Sherif" userId="c83b1e15-36f3-4f46-aceb-05aac24c545e" providerId="ADAL" clId="{0AF8ABA1-FB27-4DA0-9762-78B19B59A4B7}" dt="2023-09-27T19:14:13.981" v="769" actId="478"/>
+          <ac:inkMkLst>
+            <pc:docMk/>
+            <pc:sldMk cId="3456616918" sldId="277"/>
+            <ac:inkMk id="129" creationId="{88EDE800-60C1-4FE2-E427-4BFA0E9FC170}"/>
+          </ac:inkMkLst>
+        </pc:inkChg>
+        <pc:inkChg chg="add del mod">
+          <ac:chgData name="Khattab, Sherif" userId="c83b1e15-36f3-4f46-aceb-05aac24c545e" providerId="ADAL" clId="{0AF8ABA1-FB27-4DA0-9762-78B19B59A4B7}" dt="2023-09-27T19:14:13.981" v="769" actId="478"/>
+          <ac:inkMkLst>
+            <pc:docMk/>
+            <pc:sldMk cId="3456616918" sldId="277"/>
+            <ac:inkMk id="130" creationId="{D18F57E9-979A-C044-98ED-DC6C3FC713E0}"/>
+          </ac:inkMkLst>
+        </pc:inkChg>
+        <pc:inkChg chg="add del mod">
+          <ac:chgData name="Khattab, Sherif" userId="c83b1e15-36f3-4f46-aceb-05aac24c545e" providerId="ADAL" clId="{0AF8ABA1-FB27-4DA0-9762-78B19B59A4B7}" dt="2023-09-27T19:14:13.981" v="769" actId="478"/>
+          <ac:inkMkLst>
+            <pc:docMk/>
+            <pc:sldMk cId="3456616918" sldId="277"/>
+            <ac:inkMk id="131" creationId="{6E1A4334-024D-F9D5-30CF-BD2EAC2FEAA2}"/>
+          </ac:inkMkLst>
+        </pc:inkChg>
+        <pc:inkChg chg="add del mod">
+          <ac:chgData name="Khattab, Sherif" userId="c83b1e15-36f3-4f46-aceb-05aac24c545e" providerId="ADAL" clId="{0AF8ABA1-FB27-4DA0-9762-78B19B59A4B7}" dt="2023-09-27T19:14:13.981" v="769" actId="478"/>
+          <ac:inkMkLst>
+            <pc:docMk/>
+            <pc:sldMk cId="3456616918" sldId="277"/>
+            <ac:inkMk id="132" creationId="{144246FF-9458-D436-CADE-2382D8EF73B5}"/>
+          </ac:inkMkLst>
+        </pc:inkChg>
+        <pc:inkChg chg="add del mod">
+          <ac:chgData name="Khattab, Sherif" userId="c83b1e15-36f3-4f46-aceb-05aac24c545e" providerId="ADAL" clId="{0AF8ABA1-FB27-4DA0-9762-78B19B59A4B7}" dt="2023-09-27T19:14:13.981" v="769" actId="478"/>
+          <ac:inkMkLst>
+            <pc:docMk/>
+            <pc:sldMk cId="3456616918" sldId="277"/>
+            <ac:inkMk id="133" creationId="{3486A4AD-3224-8BA6-E380-D4C508A5B758}"/>
+          </ac:inkMkLst>
+        </pc:inkChg>
+        <pc:inkChg chg="add del mod">
+          <ac:chgData name="Khattab, Sherif" userId="c83b1e15-36f3-4f46-aceb-05aac24c545e" providerId="ADAL" clId="{0AF8ABA1-FB27-4DA0-9762-78B19B59A4B7}" dt="2023-09-27T19:14:13.981" v="769" actId="478"/>
+          <ac:inkMkLst>
+            <pc:docMk/>
+            <pc:sldMk cId="3456616918" sldId="277"/>
+            <ac:inkMk id="134" creationId="{90F4DB1D-E40A-40E4-7E32-874BFDFD4786}"/>
+          </ac:inkMkLst>
+        </pc:inkChg>
+        <pc:inkChg chg="add del mod">
+          <ac:chgData name="Khattab, Sherif" userId="c83b1e15-36f3-4f46-aceb-05aac24c545e" providerId="ADAL" clId="{0AF8ABA1-FB27-4DA0-9762-78B19B59A4B7}" dt="2023-09-27T19:14:13.981" v="769" actId="478"/>
+          <ac:inkMkLst>
+            <pc:docMk/>
+            <pc:sldMk cId="3456616918" sldId="277"/>
+            <ac:inkMk id="135" creationId="{7B66C68A-C542-57C0-9A42-23681AB7C113}"/>
+          </ac:inkMkLst>
+        </pc:inkChg>
+        <pc:inkChg chg="add mod">
+          <ac:chgData name="Khattab, Sherif" userId="c83b1e15-36f3-4f46-aceb-05aac24c545e" providerId="ADAL" clId="{0AF8ABA1-FB27-4DA0-9762-78B19B59A4B7}" dt="2023-09-27T18:54:25.342" v="443"/>
+          <ac:inkMkLst>
+            <pc:docMk/>
+            <pc:sldMk cId="3456616918" sldId="277"/>
+            <ac:inkMk id="137" creationId="{84A9C712-55D0-FBB9-DB4D-A152BFEE39B3}"/>
+          </ac:inkMkLst>
+        </pc:inkChg>
+        <pc:inkChg chg="add mod">
+          <ac:chgData name="Khattab, Sherif" userId="c83b1e15-36f3-4f46-aceb-05aac24c545e" providerId="ADAL" clId="{0AF8ABA1-FB27-4DA0-9762-78B19B59A4B7}" dt="2023-09-27T18:54:25.342" v="443"/>
+          <ac:inkMkLst>
+            <pc:docMk/>
+            <pc:sldMk cId="3456616918" sldId="277"/>
+            <ac:inkMk id="138" creationId="{30762084-21ED-43BA-AB85-AFB4BB74753F}"/>
+          </ac:inkMkLst>
+        </pc:inkChg>
+        <pc:inkChg chg="add mod">
+          <ac:chgData name="Khattab, Sherif" userId="c83b1e15-36f3-4f46-aceb-05aac24c545e" providerId="ADAL" clId="{0AF8ABA1-FB27-4DA0-9762-78B19B59A4B7}" dt="2023-09-27T18:54:25.342" v="443"/>
+          <ac:inkMkLst>
+            <pc:docMk/>
+            <pc:sldMk cId="3456616918" sldId="277"/>
+            <ac:inkMk id="139" creationId="{33C5855C-1112-6E4A-F203-1CF24ADE12DC}"/>
+          </ac:inkMkLst>
+        </pc:inkChg>
+        <pc:inkChg chg="add mod">
+          <ac:chgData name="Khattab, Sherif" userId="c83b1e15-36f3-4f46-aceb-05aac24c545e" providerId="ADAL" clId="{0AF8ABA1-FB27-4DA0-9762-78B19B59A4B7}" dt="2023-09-27T18:54:25.342" v="443"/>
+          <ac:inkMkLst>
+            <pc:docMk/>
+            <pc:sldMk cId="3456616918" sldId="277"/>
+            <ac:inkMk id="140" creationId="{5351C589-59C6-050B-2EF0-58288329CD43}"/>
+          </ac:inkMkLst>
+        </pc:inkChg>
+        <pc:inkChg chg="add mod">
+          <ac:chgData name="Khattab, Sherif" userId="c83b1e15-36f3-4f46-aceb-05aac24c545e" providerId="ADAL" clId="{0AF8ABA1-FB27-4DA0-9762-78B19B59A4B7}" dt="2023-09-27T18:54:25.342" v="443"/>
+          <ac:inkMkLst>
+            <pc:docMk/>
+            <pc:sldMk cId="3456616918" sldId="277"/>
+            <ac:inkMk id="141" creationId="{BB8B75B8-1620-DCC6-97C7-F46D36F55C5C}"/>
+          </ac:inkMkLst>
+        </pc:inkChg>
+        <pc:inkChg chg="add mod">
+          <ac:chgData name="Khattab, Sherif" userId="c83b1e15-36f3-4f46-aceb-05aac24c545e" providerId="ADAL" clId="{0AF8ABA1-FB27-4DA0-9762-78B19B59A4B7}" dt="2023-09-27T18:54:25.342" v="443"/>
+          <ac:inkMkLst>
+            <pc:docMk/>
+            <pc:sldMk cId="3456616918" sldId="277"/>
+            <ac:inkMk id="142" creationId="{ADD894BE-3584-4711-6DC8-76E5F303ADC2}"/>
+          </ac:inkMkLst>
+        </pc:inkChg>
+        <pc:inkChg chg="add mod">
+          <ac:chgData name="Khattab, Sherif" userId="c83b1e15-36f3-4f46-aceb-05aac24c545e" providerId="ADAL" clId="{0AF8ABA1-FB27-4DA0-9762-78B19B59A4B7}" dt="2023-09-27T18:54:25.342" v="443"/>
+          <ac:inkMkLst>
+            <pc:docMk/>
+            <pc:sldMk cId="3456616918" sldId="277"/>
+            <ac:inkMk id="143" creationId="{0008AD0C-B21F-6F84-3D92-94679E75C746}"/>
+          </ac:inkMkLst>
+        </pc:inkChg>
+        <pc:inkChg chg="add mod">
+          <ac:chgData name="Khattab, Sherif" userId="c83b1e15-36f3-4f46-aceb-05aac24c545e" providerId="ADAL" clId="{0AF8ABA1-FB27-4DA0-9762-78B19B59A4B7}" dt="2023-09-27T18:54:30.827" v="449"/>
+          <ac:inkMkLst>
+            <pc:docMk/>
+            <pc:sldMk cId="3456616918" sldId="277"/>
+            <ac:inkMk id="145" creationId="{DA3784D1-5760-35B5-18E7-86DCC1513D52}"/>
+          </ac:inkMkLst>
+        </pc:inkChg>
+        <pc:inkChg chg="add mod">
+          <ac:chgData name="Khattab, Sherif" userId="c83b1e15-36f3-4f46-aceb-05aac24c545e" providerId="ADAL" clId="{0AF8ABA1-FB27-4DA0-9762-78B19B59A4B7}" dt="2023-09-27T18:54:30.827" v="449"/>
+          <ac:inkMkLst>
+            <pc:docMk/>
+            <pc:sldMk cId="3456616918" sldId="277"/>
+            <ac:inkMk id="146" creationId="{21E9141E-DC66-67A8-3F71-5D4FDA4D1C87}"/>
+          </ac:inkMkLst>
+        </pc:inkChg>
+        <pc:inkChg chg="add mod">
+          <ac:chgData name="Khattab, Sherif" userId="c83b1e15-36f3-4f46-aceb-05aac24c545e" providerId="ADAL" clId="{0AF8ABA1-FB27-4DA0-9762-78B19B59A4B7}" dt="2023-09-27T18:54:30.827" v="449"/>
+          <ac:inkMkLst>
+            <pc:docMk/>
+            <pc:sldMk cId="3456616918" sldId="277"/>
+            <ac:inkMk id="147" creationId="{07F163DC-8C04-4593-B98F-DECA430513D8}"/>
+          </ac:inkMkLst>
+        </pc:inkChg>
+        <pc:inkChg chg="add mod">
+          <ac:chgData name="Khattab, Sherif" userId="c83b1e15-36f3-4f46-aceb-05aac24c545e" providerId="ADAL" clId="{0AF8ABA1-FB27-4DA0-9762-78B19B59A4B7}" dt="2023-09-27T18:54:30.827" v="449"/>
+          <ac:inkMkLst>
+            <pc:docMk/>
+            <pc:sldMk cId="3456616918" sldId="277"/>
+            <ac:inkMk id="148" creationId="{EAA53207-A7A2-A08E-9287-14D25762CB20}"/>
+          </ac:inkMkLst>
+        </pc:inkChg>
+        <pc:inkChg chg="add mod">
+          <ac:chgData name="Khattab, Sherif" userId="c83b1e15-36f3-4f46-aceb-05aac24c545e" providerId="ADAL" clId="{0AF8ABA1-FB27-4DA0-9762-78B19B59A4B7}" dt="2023-09-27T18:54:30.827" v="449"/>
+          <ac:inkMkLst>
+            <pc:docMk/>
+            <pc:sldMk cId="3456616918" sldId="277"/>
+            <ac:inkMk id="149" creationId="{6F45B183-4DE6-BC08-A937-D982C0BF5FE3}"/>
+          </ac:inkMkLst>
+        </pc:inkChg>
+        <pc:inkChg chg="add del mod">
+          <ac:chgData name="Khattab, Sherif" userId="c83b1e15-36f3-4f46-aceb-05aac24c545e" providerId="ADAL" clId="{0AF8ABA1-FB27-4DA0-9762-78B19B59A4B7}" dt="2023-09-27T19:14:13.981" v="769" actId="478"/>
+          <ac:inkMkLst>
+            <pc:docMk/>
+            <pc:sldMk cId="3456616918" sldId="277"/>
+            <ac:inkMk id="151" creationId="{D48BED67-D790-A42F-12F4-3BBF636BC802}"/>
+          </ac:inkMkLst>
+        </pc:inkChg>
+        <pc:inkChg chg="add del mod">
+          <ac:chgData name="Khattab, Sherif" userId="c83b1e15-36f3-4f46-aceb-05aac24c545e" providerId="ADAL" clId="{0AF8ABA1-FB27-4DA0-9762-78B19B59A4B7}" dt="2023-09-27T19:14:13.981" v="769" actId="478"/>
+          <ac:inkMkLst>
+            <pc:docMk/>
+            <pc:sldMk cId="3456616918" sldId="277"/>
+            <ac:inkMk id="152" creationId="{DC5DA0BA-D7A0-E6F8-C63F-1F57A86762D2}"/>
+          </ac:inkMkLst>
+        </pc:inkChg>
+        <pc:inkChg chg="add del mod">
+          <ac:chgData name="Khattab, Sherif" userId="c83b1e15-36f3-4f46-aceb-05aac24c545e" providerId="ADAL" clId="{0AF8ABA1-FB27-4DA0-9762-78B19B59A4B7}" dt="2023-09-27T19:14:13.981" v="769" actId="478"/>
+          <ac:inkMkLst>
+            <pc:docMk/>
+            <pc:sldMk cId="3456616918" sldId="277"/>
+            <ac:inkMk id="153" creationId="{A3423C31-C2F2-052B-5D5D-843202069034}"/>
+          </ac:inkMkLst>
+        </pc:inkChg>
+        <pc:inkChg chg="add del mod">
+          <ac:chgData name="Khattab, Sherif" userId="c83b1e15-36f3-4f46-aceb-05aac24c545e" providerId="ADAL" clId="{0AF8ABA1-FB27-4DA0-9762-78B19B59A4B7}" dt="2023-09-27T19:14:13.981" v="769" actId="478"/>
+          <ac:inkMkLst>
+            <pc:docMk/>
+            <pc:sldMk cId="3456616918" sldId="277"/>
+            <ac:inkMk id="154" creationId="{CD43822F-BA9C-05EE-1ED0-ADB49A0AABFF}"/>
+          </ac:inkMkLst>
+        </pc:inkChg>
+        <pc:inkChg chg="add del mod">
+          <ac:chgData name="Khattab, Sherif" userId="c83b1e15-36f3-4f46-aceb-05aac24c545e" providerId="ADAL" clId="{0AF8ABA1-FB27-4DA0-9762-78B19B59A4B7}" dt="2023-09-27T19:14:13.981" v="769" actId="478"/>
+          <ac:inkMkLst>
+            <pc:docMk/>
+            <pc:sldMk cId="3456616918" sldId="277"/>
+            <ac:inkMk id="155" creationId="{D0341DDB-00C6-4BAE-7BC3-62E096487278}"/>
+          </ac:inkMkLst>
+        </pc:inkChg>
+        <pc:inkChg chg="add del mod">
+          <ac:chgData name="Khattab, Sherif" userId="c83b1e15-36f3-4f46-aceb-05aac24c545e" providerId="ADAL" clId="{0AF8ABA1-FB27-4DA0-9762-78B19B59A4B7}" dt="2023-09-27T19:14:13.981" v="769" actId="478"/>
+          <ac:inkMkLst>
+            <pc:docMk/>
+            <pc:sldMk cId="3456616918" sldId="277"/>
+            <ac:inkMk id="156" creationId="{538E0A8E-1CA3-E560-29CD-4A719F8CEC46}"/>
+          </ac:inkMkLst>
+        </pc:inkChg>
+        <pc:inkChg chg="add del mod">
+          <ac:chgData name="Khattab, Sherif" userId="c83b1e15-36f3-4f46-aceb-05aac24c545e" providerId="ADAL" clId="{0AF8ABA1-FB27-4DA0-9762-78B19B59A4B7}" dt="2023-09-27T19:14:13.981" v="769" actId="478"/>
+          <ac:inkMkLst>
+            <pc:docMk/>
+            <pc:sldMk cId="3456616918" sldId="277"/>
+            <ac:inkMk id="157" creationId="{E058C7C8-0997-957B-DC3B-26CDE501EAAD}"/>
+          </ac:inkMkLst>
+        </pc:inkChg>
+        <pc:inkChg chg="add del mod">
+          <ac:chgData name="Khattab, Sherif" userId="c83b1e15-36f3-4f46-aceb-05aac24c545e" providerId="ADAL" clId="{0AF8ABA1-FB27-4DA0-9762-78B19B59A4B7}" dt="2023-09-27T19:14:13.981" v="769" actId="478"/>
+          <ac:inkMkLst>
+            <pc:docMk/>
+            <pc:sldMk cId="3456616918" sldId="277"/>
+            <ac:inkMk id="161" creationId="{0A69B9A2-41E9-FFAD-B02A-19F653888C9F}"/>
+          </ac:inkMkLst>
+        </pc:inkChg>
+        <pc:inkChg chg="add del mod">
+          <ac:chgData name="Khattab, Sherif" userId="c83b1e15-36f3-4f46-aceb-05aac24c545e" providerId="ADAL" clId="{0AF8ABA1-FB27-4DA0-9762-78B19B59A4B7}" dt="2023-09-27T19:14:13.981" v="769" actId="478"/>
+          <ac:inkMkLst>
+            <pc:docMk/>
+            <pc:sldMk cId="3456616918" sldId="277"/>
+            <ac:inkMk id="162" creationId="{A07B36B2-0DDC-BC48-384E-23BD8F555AA7}"/>
+          </ac:inkMkLst>
+        </pc:inkChg>
+        <pc:inkChg chg="add del mod">
+          <ac:chgData name="Khattab, Sherif" userId="c83b1e15-36f3-4f46-aceb-05aac24c545e" providerId="ADAL" clId="{0AF8ABA1-FB27-4DA0-9762-78B19B59A4B7}" dt="2023-09-27T19:14:13.981" v="769" actId="478"/>
+          <ac:inkMkLst>
+            <pc:docMk/>
+            <pc:sldMk cId="3456616918" sldId="277"/>
+            <ac:inkMk id="163" creationId="{92568818-5C75-78C3-0B38-1E6321D1120F}"/>
+          </ac:inkMkLst>
+        </pc:inkChg>
+        <pc:inkChg chg="add del mod">
+          <ac:chgData name="Khattab, Sherif" userId="c83b1e15-36f3-4f46-aceb-05aac24c545e" providerId="ADAL" clId="{0AF8ABA1-FB27-4DA0-9762-78B19B59A4B7}" dt="2023-09-27T19:14:13.981" v="769" actId="478"/>
+          <ac:inkMkLst>
+            <pc:docMk/>
+            <pc:sldMk cId="3456616918" sldId="277"/>
+            <ac:inkMk id="164" creationId="{9ECAA418-8BA0-55FB-BFD0-FBB66512CF73}"/>
+          </ac:inkMkLst>
+        </pc:inkChg>
+        <pc:inkChg chg="add del mod">
+          <ac:chgData name="Khattab, Sherif" userId="c83b1e15-36f3-4f46-aceb-05aac24c545e" providerId="ADAL" clId="{0AF8ABA1-FB27-4DA0-9762-78B19B59A4B7}" dt="2023-09-27T19:14:13.981" v="769" actId="478"/>
+          <ac:inkMkLst>
+            <pc:docMk/>
+            <pc:sldMk cId="3456616918" sldId="277"/>
+            <ac:inkMk id="165" creationId="{B5D64B2C-BD0B-274D-DF50-B90FD61FEAD2}"/>
+          </ac:inkMkLst>
+        </pc:inkChg>
+        <pc:inkChg chg="add del mod">
+          <ac:chgData name="Khattab, Sherif" userId="c83b1e15-36f3-4f46-aceb-05aac24c545e" providerId="ADAL" clId="{0AF8ABA1-FB27-4DA0-9762-78B19B59A4B7}" dt="2023-09-27T19:14:13.981" v="769" actId="478"/>
+          <ac:inkMkLst>
+            <pc:docMk/>
+            <pc:sldMk cId="3456616918" sldId="277"/>
+            <ac:inkMk id="166" creationId="{A2E69E50-BDF3-3EED-AFA1-9C4AC358D567}"/>
+          </ac:inkMkLst>
+        </pc:inkChg>
+        <pc:inkChg chg="add del mod">
+          <ac:chgData name="Khattab, Sherif" userId="c83b1e15-36f3-4f46-aceb-05aac24c545e" providerId="ADAL" clId="{0AF8ABA1-FB27-4DA0-9762-78B19B59A4B7}" dt="2023-09-27T19:14:13.981" v="769" actId="478"/>
+          <ac:inkMkLst>
+            <pc:docMk/>
+            <pc:sldMk cId="3456616918" sldId="277"/>
+            <ac:inkMk id="167" creationId="{424914FC-BF22-7DB0-90FE-CC450777BB21}"/>
+          </ac:inkMkLst>
+        </pc:inkChg>
+        <pc:inkChg chg="add del mod">
+          <ac:chgData name="Khattab, Sherif" userId="c83b1e15-36f3-4f46-aceb-05aac24c545e" providerId="ADAL" clId="{0AF8ABA1-FB27-4DA0-9762-78B19B59A4B7}" dt="2023-09-27T19:14:13.981" v="769" actId="478"/>
+          <ac:inkMkLst>
+            <pc:docMk/>
+            <pc:sldMk cId="3456616918" sldId="277"/>
+            <ac:inkMk id="168" creationId="{1953FB84-6C90-5265-23C5-1424918FF8C0}"/>
+          </ac:inkMkLst>
+        </pc:inkChg>
+        <pc:inkChg chg="add del mod">
+          <ac:chgData name="Khattab, Sherif" userId="c83b1e15-36f3-4f46-aceb-05aac24c545e" providerId="ADAL" clId="{0AF8ABA1-FB27-4DA0-9762-78B19B59A4B7}" dt="2023-09-27T19:14:13.981" v="769" actId="478"/>
+          <ac:inkMkLst>
+            <pc:docMk/>
+            <pc:sldMk cId="3456616918" sldId="277"/>
+            <ac:inkMk id="171" creationId="{A8E45303-8EE5-97AE-C42E-234C86B25DF0}"/>
+          </ac:inkMkLst>
+        </pc:inkChg>
+        <pc:inkChg chg="add del mod">
+          <ac:chgData name="Khattab, Sherif" userId="c83b1e15-36f3-4f46-aceb-05aac24c545e" providerId="ADAL" clId="{0AF8ABA1-FB27-4DA0-9762-78B19B59A4B7}" dt="2023-09-27T19:14:13.981" v="769" actId="478"/>
+          <ac:inkMkLst>
+            <pc:docMk/>
+            <pc:sldMk cId="3456616918" sldId="277"/>
+            <ac:inkMk id="172" creationId="{C1C53BF6-763F-A986-440E-0ED88DBE58C5}"/>
+          </ac:inkMkLst>
+        </pc:inkChg>
+        <pc:inkChg chg="add del mod">
+          <ac:chgData name="Khattab, Sherif" userId="c83b1e15-36f3-4f46-aceb-05aac24c545e" providerId="ADAL" clId="{0AF8ABA1-FB27-4DA0-9762-78B19B59A4B7}" dt="2023-09-27T19:14:13.981" v="769" actId="478"/>
+          <ac:inkMkLst>
+            <pc:docMk/>
+            <pc:sldMk cId="3456616918" sldId="277"/>
+            <ac:inkMk id="173" creationId="{14EC8F4A-40E2-23A9-30CA-3E5FC97920F4}"/>
+          </ac:inkMkLst>
+        </pc:inkChg>
+        <pc:inkChg chg="add del mod">
+          <ac:chgData name="Khattab, Sherif" userId="c83b1e15-36f3-4f46-aceb-05aac24c545e" providerId="ADAL" clId="{0AF8ABA1-FB27-4DA0-9762-78B19B59A4B7}" dt="2023-09-27T19:14:13.981" v="769" actId="478"/>
+          <ac:inkMkLst>
+            <pc:docMk/>
+            <pc:sldMk cId="3456616918" sldId="277"/>
+            <ac:inkMk id="174" creationId="{1C312514-7D1B-462A-17FB-A53D9435547D}"/>
+          </ac:inkMkLst>
+        </pc:inkChg>
+        <pc:inkChg chg="add del mod">
+          <ac:chgData name="Khattab, Sherif" userId="c83b1e15-36f3-4f46-aceb-05aac24c545e" providerId="ADAL" clId="{0AF8ABA1-FB27-4DA0-9762-78B19B59A4B7}" dt="2023-09-27T19:14:13.981" v="769" actId="478"/>
+          <ac:inkMkLst>
+            <pc:docMk/>
+            <pc:sldMk cId="3456616918" sldId="277"/>
+            <ac:inkMk id="175" creationId="{EB54C728-3990-B796-B003-719FDD920D30}"/>
+          </ac:inkMkLst>
+        </pc:inkChg>
+        <pc:inkChg chg="add del mod">
+          <ac:chgData name="Khattab, Sherif" userId="c83b1e15-36f3-4f46-aceb-05aac24c545e" providerId="ADAL" clId="{0AF8ABA1-FB27-4DA0-9762-78B19B59A4B7}" dt="2023-09-27T19:14:13.981" v="769" actId="478"/>
+          <ac:inkMkLst>
+            <pc:docMk/>
+            <pc:sldMk cId="3456616918" sldId="277"/>
+            <ac:inkMk id="176" creationId="{1E845EB8-3F67-6AD0-58FE-11E8BCD6213D}"/>
+          </ac:inkMkLst>
+        </pc:inkChg>
+        <pc:inkChg chg="add del mod">
+          <ac:chgData name="Khattab, Sherif" userId="c83b1e15-36f3-4f46-aceb-05aac24c545e" providerId="ADAL" clId="{0AF8ABA1-FB27-4DA0-9762-78B19B59A4B7}" dt="2023-09-27T19:14:13.981" v="769" actId="478"/>
+          <ac:inkMkLst>
+            <pc:docMk/>
+            <pc:sldMk cId="3456616918" sldId="277"/>
+            <ac:inkMk id="177" creationId="{9F0D694F-AFA6-8788-DFDB-5EAF7524BC67}"/>
+          </ac:inkMkLst>
+        </pc:inkChg>
+        <pc:inkChg chg="add del mod">
+          <ac:chgData name="Khattab, Sherif" userId="c83b1e15-36f3-4f46-aceb-05aac24c545e" providerId="ADAL" clId="{0AF8ABA1-FB27-4DA0-9762-78B19B59A4B7}" dt="2023-09-27T19:14:13.981" v="769" actId="478"/>
+          <ac:inkMkLst>
+            <pc:docMk/>
+            <pc:sldMk cId="3456616918" sldId="277"/>
+            <ac:inkMk id="179" creationId="{BB13DF40-5ECB-FCBA-78CA-2FDD221E8146}"/>
+          </ac:inkMkLst>
+        </pc:inkChg>
+        <pc:inkChg chg="add del mod">
+          <ac:chgData name="Khattab, Sherif" userId="c83b1e15-36f3-4f46-aceb-05aac24c545e" providerId="ADAL" clId="{0AF8ABA1-FB27-4DA0-9762-78B19B59A4B7}" dt="2023-09-27T19:14:13.981" v="769" actId="478"/>
+          <ac:inkMkLst>
+            <pc:docMk/>
+            <pc:sldMk cId="3456616918" sldId="277"/>
+            <ac:inkMk id="180" creationId="{98244C6F-7E0D-08EE-1BEC-D5BD70F03774}"/>
+          </ac:inkMkLst>
+        </pc:inkChg>
+        <pc:inkChg chg="add del mod">
+          <ac:chgData name="Khattab, Sherif" userId="c83b1e15-36f3-4f46-aceb-05aac24c545e" providerId="ADAL" clId="{0AF8ABA1-FB27-4DA0-9762-78B19B59A4B7}" dt="2023-09-27T19:14:13.981" v="769" actId="478"/>
+          <ac:inkMkLst>
+            <pc:docMk/>
+            <pc:sldMk cId="3456616918" sldId="277"/>
+            <ac:inkMk id="182" creationId="{12E0C1CD-2906-4488-FD83-EE9A15AC62CB}"/>
+          </ac:inkMkLst>
+        </pc:inkChg>
+        <pc:inkChg chg="add del mod">
+          <ac:chgData name="Khattab, Sherif" userId="c83b1e15-36f3-4f46-aceb-05aac24c545e" providerId="ADAL" clId="{0AF8ABA1-FB27-4DA0-9762-78B19B59A4B7}" dt="2023-09-27T19:14:13.981" v="769" actId="478"/>
+          <ac:inkMkLst>
+            <pc:docMk/>
+            <pc:sldMk cId="3456616918" sldId="277"/>
+            <ac:inkMk id="184" creationId="{3948A821-6D74-7379-953D-204228F82488}"/>
+          </ac:inkMkLst>
+        </pc:inkChg>
+        <pc:inkChg chg="add del mod">
+          <ac:chgData name="Khattab, Sherif" userId="c83b1e15-36f3-4f46-aceb-05aac24c545e" providerId="ADAL" clId="{0AF8ABA1-FB27-4DA0-9762-78B19B59A4B7}" dt="2023-09-27T19:14:13.981" v="769" actId="478"/>
+          <ac:inkMkLst>
+            <pc:docMk/>
+            <pc:sldMk cId="3456616918" sldId="277"/>
+            <ac:inkMk id="185" creationId="{FDFF9530-FF3F-7B82-0274-F23D3A3C90FF}"/>
+          </ac:inkMkLst>
+        </pc:inkChg>
+        <pc:inkChg chg="add del mod">
+          <ac:chgData name="Khattab, Sherif" userId="c83b1e15-36f3-4f46-aceb-05aac24c545e" providerId="ADAL" clId="{0AF8ABA1-FB27-4DA0-9762-78B19B59A4B7}" dt="2023-09-27T19:14:13.981" v="769" actId="478"/>
+          <ac:inkMkLst>
+            <pc:docMk/>
+            <pc:sldMk cId="3456616918" sldId="277"/>
+            <ac:inkMk id="186" creationId="{CBBD118D-165E-0979-25F4-0395F67E3CFB}"/>
+          </ac:inkMkLst>
+        </pc:inkChg>
+        <pc:inkChg chg="add del mod">
+          <ac:chgData name="Khattab, Sherif" userId="c83b1e15-36f3-4f46-aceb-05aac24c545e" providerId="ADAL" clId="{0AF8ABA1-FB27-4DA0-9762-78B19B59A4B7}" dt="2023-09-27T19:14:13.981" v="769" actId="478"/>
+          <ac:inkMkLst>
+            <pc:docMk/>
+            <pc:sldMk cId="3456616918" sldId="277"/>
+            <ac:inkMk id="187" creationId="{0F894CBB-1848-450F-68C8-6D2CB22C6F8F}"/>
+          </ac:inkMkLst>
+        </pc:inkChg>
+        <pc:inkChg chg="add del mod">
+          <ac:chgData name="Khattab, Sherif" userId="c83b1e15-36f3-4f46-aceb-05aac24c545e" providerId="ADAL" clId="{0AF8ABA1-FB27-4DA0-9762-78B19B59A4B7}" dt="2023-09-27T19:14:13.981" v="769" actId="478"/>
+          <ac:inkMkLst>
+            <pc:docMk/>
+            <pc:sldMk cId="3456616918" sldId="277"/>
+            <ac:inkMk id="188" creationId="{557C956A-4818-EE8B-C145-028FF1B980C6}"/>
+          </ac:inkMkLst>
+        </pc:inkChg>
+        <pc:inkChg chg="add del mod">
+          <ac:chgData name="Khattab, Sherif" userId="c83b1e15-36f3-4f46-aceb-05aac24c545e" providerId="ADAL" clId="{0AF8ABA1-FB27-4DA0-9762-78B19B59A4B7}" dt="2023-09-27T19:14:13.981" v="769" actId="478"/>
+          <ac:inkMkLst>
+            <pc:docMk/>
+            <pc:sldMk cId="3456616918" sldId="277"/>
+            <ac:inkMk id="190" creationId="{B2019E96-0BF2-E1F7-375B-537D6088D149}"/>
+          </ac:inkMkLst>
+        </pc:inkChg>
+        <pc:inkChg chg="add del mod">
+          <ac:chgData name="Khattab, Sherif" userId="c83b1e15-36f3-4f46-aceb-05aac24c545e" providerId="ADAL" clId="{0AF8ABA1-FB27-4DA0-9762-78B19B59A4B7}" dt="2023-09-27T19:14:13.981" v="769" actId="478"/>
+          <ac:inkMkLst>
+            <pc:docMk/>
+            <pc:sldMk cId="3456616918" sldId="277"/>
+            <ac:inkMk id="191" creationId="{A062E8C6-CF85-93A7-C348-CD2BD040762C}"/>
+          </ac:inkMkLst>
+        </pc:inkChg>
+        <pc:inkChg chg="add mod">
+          <ac:chgData name="Khattab, Sherif" userId="c83b1e15-36f3-4f46-aceb-05aac24c545e" providerId="ADAL" clId="{0AF8ABA1-FB27-4DA0-9762-78B19B59A4B7}" dt="2023-09-27T18:55:29.685" v="498"/>
+          <ac:inkMkLst>
+            <pc:docMk/>
+            <pc:sldMk cId="3456616918" sldId="277"/>
+            <ac:inkMk id="193" creationId="{94CBFD0E-5324-B921-9156-B79A44693192}"/>
+          </ac:inkMkLst>
+        </pc:inkChg>
+        <pc:inkChg chg="add mod">
+          <ac:chgData name="Khattab, Sherif" userId="c83b1e15-36f3-4f46-aceb-05aac24c545e" providerId="ADAL" clId="{0AF8ABA1-FB27-4DA0-9762-78B19B59A4B7}" dt="2023-09-27T18:55:29.685" v="498"/>
+          <ac:inkMkLst>
+            <pc:docMk/>
+            <pc:sldMk cId="3456616918" sldId="277"/>
+            <ac:inkMk id="194" creationId="{2846E325-CBE9-FD0C-CBF9-39C3D5B24361}"/>
+          </ac:inkMkLst>
+        </pc:inkChg>
+        <pc:inkChg chg="add mod">
+          <ac:chgData name="Khattab, Sherif" userId="c83b1e15-36f3-4f46-aceb-05aac24c545e" providerId="ADAL" clId="{0AF8ABA1-FB27-4DA0-9762-78B19B59A4B7}" dt="2023-09-27T18:55:29.685" v="498"/>
+          <ac:inkMkLst>
+            <pc:docMk/>
+            <pc:sldMk cId="3456616918" sldId="277"/>
+            <ac:inkMk id="195" creationId="{6479AE2C-AF2E-4B4E-AB4C-F3F9CE8B0D11}"/>
+          </ac:inkMkLst>
+        </pc:inkChg>
+        <pc:inkChg chg="add mod">
+          <ac:chgData name="Khattab, Sherif" userId="c83b1e15-36f3-4f46-aceb-05aac24c545e" providerId="ADAL" clId="{0AF8ABA1-FB27-4DA0-9762-78B19B59A4B7}" dt="2023-09-27T18:55:29.685" v="498"/>
+          <ac:inkMkLst>
+            <pc:docMk/>
+            <pc:sldMk cId="3456616918" sldId="277"/>
+            <ac:inkMk id="196" creationId="{431F6890-9800-149F-D3B2-43ACC2DAB8E7}"/>
+          </ac:inkMkLst>
+        </pc:inkChg>
+        <pc:inkChg chg="add mod">
+          <ac:chgData name="Khattab, Sherif" userId="c83b1e15-36f3-4f46-aceb-05aac24c545e" providerId="ADAL" clId="{0AF8ABA1-FB27-4DA0-9762-78B19B59A4B7}" dt="2023-09-27T18:55:29.685" v="498"/>
+          <ac:inkMkLst>
+            <pc:docMk/>
+            <pc:sldMk cId="3456616918" sldId="277"/>
+            <ac:inkMk id="198" creationId="{F1CEF656-D148-9784-6406-56018D42CBB4}"/>
+          </ac:inkMkLst>
+        </pc:inkChg>
+        <pc:inkChg chg="add mod">
+          <ac:chgData name="Khattab, Sherif" userId="c83b1e15-36f3-4f46-aceb-05aac24c545e" providerId="ADAL" clId="{0AF8ABA1-FB27-4DA0-9762-78B19B59A4B7}" dt="2023-09-27T18:55:29.685" v="498"/>
+          <ac:inkMkLst>
+            <pc:docMk/>
+            <pc:sldMk cId="3456616918" sldId="277"/>
+            <ac:inkMk id="199" creationId="{87CC074E-C2FB-9DE2-FD34-D180A785163E}"/>
+          </ac:inkMkLst>
+        </pc:inkChg>
+        <pc:inkChg chg="add mod">
+          <ac:chgData name="Khattab, Sherif" userId="c83b1e15-36f3-4f46-aceb-05aac24c545e" providerId="ADAL" clId="{0AF8ABA1-FB27-4DA0-9762-78B19B59A4B7}" dt="2023-09-27T18:55:29.685" v="498"/>
+          <ac:inkMkLst>
+            <pc:docMk/>
+            <pc:sldMk cId="3456616918" sldId="277"/>
+            <ac:inkMk id="200" creationId="{88C4762C-E942-F439-8990-D005292C2E99}"/>
+          </ac:inkMkLst>
+        </pc:inkChg>
+        <pc:inkChg chg="add del">
+          <ac:chgData name="Khattab, Sherif" userId="c83b1e15-36f3-4f46-aceb-05aac24c545e" providerId="ADAL" clId="{0AF8ABA1-FB27-4DA0-9762-78B19B59A4B7}" dt="2023-09-27T19:14:17.235" v="770" actId="478"/>
+          <ac:inkMkLst>
+            <pc:docMk/>
+            <pc:sldMk cId="3456616918" sldId="277"/>
+            <ac:inkMk id="201" creationId="{279A422F-F5E5-1BBC-2F87-6E252A4C53E1}"/>
+          </ac:inkMkLst>
+        </pc:inkChg>
+        <pc:inkChg chg="add del mod">
+          <ac:chgData name="Khattab, Sherif" userId="c83b1e15-36f3-4f46-aceb-05aac24c545e" providerId="ADAL" clId="{0AF8ABA1-FB27-4DA0-9762-78B19B59A4B7}" dt="2023-09-27T19:14:13.981" v="769" actId="478"/>
+          <ac:inkMkLst>
+            <pc:docMk/>
+            <pc:sldMk cId="3456616918" sldId="277"/>
+            <ac:inkMk id="204" creationId="{50B544F1-93E0-6B68-6572-C4073AFD9657}"/>
+          </ac:inkMkLst>
+        </pc:inkChg>
+        <pc:inkChg chg="add del mod">
+          <ac:chgData name="Khattab, Sherif" userId="c83b1e15-36f3-4f46-aceb-05aac24c545e" providerId="ADAL" clId="{0AF8ABA1-FB27-4DA0-9762-78B19B59A4B7}" dt="2023-09-27T19:14:13.981" v="769" actId="478"/>
+          <ac:inkMkLst>
+            <pc:docMk/>
+            <pc:sldMk cId="3456616918" sldId="277"/>
+            <ac:inkMk id="205" creationId="{0DE6F8B5-01A2-7531-BA17-34E87E4F14E5}"/>
+          </ac:inkMkLst>
+        </pc:inkChg>
+        <pc:inkChg chg="add del mod">
+          <ac:chgData name="Khattab, Sherif" userId="c83b1e15-36f3-4f46-aceb-05aac24c545e" providerId="ADAL" clId="{0AF8ABA1-FB27-4DA0-9762-78B19B59A4B7}" dt="2023-09-27T19:14:13.981" v="769" actId="478"/>
+          <ac:inkMkLst>
+            <pc:docMk/>
+            <pc:sldMk cId="3456616918" sldId="277"/>
+            <ac:inkMk id="206" creationId="{0BCC7A51-FDB4-AA78-F8C4-4DCA13A8C55B}"/>
+          </ac:inkMkLst>
+        </pc:inkChg>
+        <pc:inkChg chg="add del">
+          <ac:chgData name="Khattab, Sherif" userId="c83b1e15-36f3-4f46-aceb-05aac24c545e" providerId="ADAL" clId="{0AF8ABA1-FB27-4DA0-9762-78B19B59A4B7}" dt="2023-09-27T18:56:44.658" v="516" actId="9405"/>
+          <ac:inkMkLst>
+            <pc:docMk/>
+            <pc:sldMk cId="3456616918" sldId="277"/>
+            <ac:inkMk id="208" creationId="{047C7F5B-EA31-4AD5-97D3-A71FFB76ACFA}"/>
+          </ac:inkMkLst>
+        </pc:inkChg>
+        <pc:inkChg chg="add del">
+          <ac:chgData name="Khattab, Sherif" userId="c83b1e15-36f3-4f46-aceb-05aac24c545e" providerId="ADAL" clId="{0AF8ABA1-FB27-4DA0-9762-78B19B59A4B7}" dt="2023-09-27T18:56:44.340" v="515" actId="9405"/>
+          <ac:inkMkLst>
+            <pc:docMk/>
+            <pc:sldMk cId="3456616918" sldId="277"/>
+            <ac:inkMk id="209" creationId="{272FD6D6-75E6-F146-DB06-D34AD9F7F4C8}"/>
+          </ac:inkMkLst>
+        </pc:inkChg>
+        <pc:inkChg chg="add del mod">
+          <ac:chgData name="Khattab, Sherif" userId="c83b1e15-36f3-4f46-aceb-05aac24c545e" providerId="ADAL" clId="{0AF8ABA1-FB27-4DA0-9762-78B19B59A4B7}" dt="2023-09-27T18:56:43.959" v="514" actId="9405"/>
+          <ac:inkMkLst>
+            <pc:docMk/>
+            <pc:sldMk cId="3456616918" sldId="277"/>
+            <ac:inkMk id="210" creationId="{221A8BEB-90BD-F91E-D2E6-7378AE300A5E}"/>
+          </ac:inkMkLst>
+        </pc:inkChg>
+        <pc:inkChg chg="add del mod">
+          <ac:chgData name="Khattab, Sherif" userId="c83b1e15-36f3-4f46-aceb-05aac24c545e" providerId="ADAL" clId="{0AF8ABA1-FB27-4DA0-9762-78B19B59A4B7}" dt="2023-09-27T18:56:43.533" v="513" actId="9405"/>
+          <ac:inkMkLst>
+            <pc:docMk/>
+            <pc:sldMk cId="3456616918" sldId="277"/>
+            <ac:inkMk id="211" creationId="{C75DEF58-E97C-10E5-E32C-661A151471A9}"/>
+          </ac:inkMkLst>
+        </pc:inkChg>
+        <pc:inkChg chg="add del mod">
+          <ac:chgData name="Khattab, Sherif" userId="c83b1e15-36f3-4f46-aceb-05aac24c545e" providerId="ADAL" clId="{0AF8ABA1-FB27-4DA0-9762-78B19B59A4B7}" dt="2023-09-27T18:56:43.205" v="512" actId="9405"/>
+          <ac:inkMkLst>
+            <pc:docMk/>
+            <pc:sldMk cId="3456616918" sldId="277"/>
+            <ac:inkMk id="212" creationId="{7F4E10FB-85C2-968D-1D39-AD5DC8993D0F}"/>
+          </ac:inkMkLst>
+        </pc:inkChg>
+        <pc:inkChg chg="add del mod">
+          <ac:chgData name="Khattab, Sherif" userId="c83b1e15-36f3-4f46-aceb-05aac24c545e" providerId="ADAL" clId="{0AF8ABA1-FB27-4DA0-9762-78B19B59A4B7}" dt="2023-09-27T18:56:42.830" v="511"/>
+          <ac:inkMkLst>
+            <pc:docMk/>
+            <pc:sldMk cId="3456616918" sldId="277"/>
+            <ac:inkMk id="213" creationId="{295F07B8-2812-30D1-09B3-33AFFCD74516}"/>
+          </ac:inkMkLst>
+        </pc:inkChg>
+        <pc:inkChg chg="add del mod">
+          <ac:chgData name="Khattab, Sherif" userId="c83b1e15-36f3-4f46-aceb-05aac24c545e" providerId="ADAL" clId="{0AF8ABA1-FB27-4DA0-9762-78B19B59A4B7}" dt="2023-09-27T19:14:13.981" v="769" actId="478"/>
+          <ac:inkMkLst>
+            <pc:docMk/>
+            <pc:sldMk cId="3456616918" sldId="277"/>
+            <ac:inkMk id="216" creationId="{437A77A7-96E8-321D-E250-81868E48F30F}"/>
+          </ac:inkMkLst>
+        </pc:inkChg>
+        <pc:inkChg chg="add del mod">
+          <ac:chgData name="Khattab, Sherif" userId="c83b1e15-36f3-4f46-aceb-05aac24c545e" providerId="ADAL" clId="{0AF8ABA1-FB27-4DA0-9762-78B19B59A4B7}" dt="2023-09-27T19:14:13.981" v="769" actId="478"/>
+          <ac:inkMkLst>
+            <pc:docMk/>
+            <pc:sldMk cId="3456616918" sldId="277"/>
+            <ac:inkMk id="217" creationId="{E7804A13-C746-6B41-E1F6-E09468290582}"/>
+          </ac:inkMkLst>
+        </pc:inkChg>
+        <pc:inkChg chg="add del mod">
+          <ac:chgData name="Khattab, Sherif" userId="c83b1e15-36f3-4f46-aceb-05aac24c545e" providerId="ADAL" clId="{0AF8ABA1-FB27-4DA0-9762-78B19B59A4B7}" dt="2023-09-27T19:14:13.981" v="769" actId="478"/>
+          <ac:inkMkLst>
+            <pc:docMk/>
+            <pc:sldMk cId="3456616918" sldId="277"/>
+            <ac:inkMk id="218" creationId="{36C137B9-46A7-5C7B-A0B9-5A2B22B1C66E}"/>
+          </ac:inkMkLst>
+        </pc:inkChg>
+        <pc:inkChg chg="add del mod">
+          <ac:chgData name="Khattab, Sherif" userId="c83b1e15-36f3-4f46-aceb-05aac24c545e" providerId="ADAL" clId="{0AF8ABA1-FB27-4DA0-9762-78B19B59A4B7}" dt="2023-09-27T19:14:13.981" v="769" actId="478"/>
+          <ac:inkMkLst>
+            <pc:docMk/>
+            <pc:sldMk cId="3456616918" sldId="277"/>
+            <ac:inkMk id="219" creationId="{E92BCE37-FAC5-F3AA-3F83-02143F80EFD6}"/>
+          </ac:inkMkLst>
+        </pc:inkChg>
+        <pc:inkChg chg="add del mod">
+          <ac:chgData name="Khattab, Sherif" userId="c83b1e15-36f3-4f46-aceb-05aac24c545e" providerId="ADAL" clId="{0AF8ABA1-FB27-4DA0-9762-78B19B59A4B7}" dt="2023-09-27T19:14:13.981" v="769" actId="478"/>
+          <ac:inkMkLst>
+            <pc:docMk/>
+            <pc:sldMk cId="3456616918" sldId="277"/>
+            <ac:inkMk id="220" creationId="{DD497605-3443-13CC-C56E-1B4921DA2188}"/>
+          </ac:inkMkLst>
+        </pc:inkChg>
+        <pc:inkChg chg="add del mod">
+          <ac:chgData name="Khattab, Sherif" userId="c83b1e15-36f3-4f46-aceb-05aac24c545e" providerId="ADAL" clId="{0AF8ABA1-FB27-4DA0-9762-78B19B59A4B7}" dt="2023-09-27T19:14:13.981" v="769" actId="478"/>
+          <ac:inkMkLst>
+            <pc:docMk/>
+            <pc:sldMk cId="3456616918" sldId="277"/>
+            <ac:inkMk id="221" creationId="{7B3CF5C5-2F8C-1EFD-8500-2A5DEE0E5C46}"/>
+          </ac:inkMkLst>
+        </pc:inkChg>
+        <pc:inkChg chg="add del mod">
+          <ac:chgData name="Khattab, Sherif" userId="c83b1e15-36f3-4f46-aceb-05aac24c545e" providerId="ADAL" clId="{0AF8ABA1-FB27-4DA0-9762-78B19B59A4B7}" dt="2023-09-27T19:14:13.981" v="769" actId="478"/>
+          <ac:inkMkLst>
+            <pc:docMk/>
+            <pc:sldMk cId="3456616918" sldId="277"/>
+            <ac:inkMk id="223" creationId="{873683C0-EF2E-957E-7193-58992FEFF071}"/>
+          </ac:inkMkLst>
+        </pc:inkChg>
+        <pc:inkChg chg="add del mod">
+          <ac:chgData name="Khattab, Sherif" userId="c83b1e15-36f3-4f46-aceb-05aac24c545e" providerId="ADAL" clId="{0AF8ABA1-FB27-4DA0-9762-78B19B59A4B7}" dt="2023-09-27T19:14:13.981" v="769" actId="478"/>
+          <ac:inkMkLst>
+            <pc:docMk/>
+            <pc:sldMk cId="3456616918" sldId="277"/>
+            <ac:inkMk id="224" creationId="{4C0ECD56-9660-922D-2E4F-C5DF1EB18133}"/>
+          </ac:inkMkLst>
+        </pc:inkChg>
+        <pc:inkChg chg="add mod">
+          <ac:chgData name="Khattab, Sherif" userId="c83b1e15-36f3-4f46-aceb-05aac24c545e" providerId="ADAL" clId="{0AF8ABA1-FB27-4DA0-9762-78B19B59A4B7}" dt="2023-09-27T18:58:09.949" v="528"/>
+          <ac:inkMkLst>
+            <pc:docMk/>
+            <pc:sldMk cId="3456616918" sldId="277"/>
+            <ac:inkMk id="226" creationId="{A3B6AB0E-E7CB-F132-C630-9C002C94AC9A}"/>
+          </ac:inkMkLst>
+        </pc:inkChg>
+      </pc:sldChg>
+      <pc:sldChg chg="modSp new del mod">
+        <pc:chgData name="Khattab, Sherif" userId="c83b1e15-36f3-4f46-aceb-05aac24c545e" providerId="ADAL" clId="{0AF8ABA1-FB27-4DA0-9762-78B19B59A4B7}" dt="2023-09-27T19:14:27.207" v="774" actId="47"/>
+        <pc:sldMkLst>
+          <pc:docMk/>
+          <pc:sldMk cId="2735883260" sldId="278"/>
+        </pc:sldMkLst>
+        <pc:spChg chg="mod">
+          <ac:chgData name="Khattab, Sherif" userId="c83b1e15-36f3-4f46-aceb-05aac24c545e" providerId="ADAL" clId="{0AF8ABA1-FB27-4DA0-9762-78B19B59A4B7}" dt="2023-09-27T19:04:38.442" v="766" actId="20577"/>
+          <ac:spMkLst>
+            <pc:docMk/>
+            <pc:sldMk cId="2735883260" sldId="278"/>
+            <ac:spMk id="3" creationId="{E90C6E97-720C-B2A7-33AD-75A42623EDFE}"/>
           </ac:spMkLst>
         </pc:spChg>
       </pc:sldChg>
@@ -6589,15 +8404,7 @@
             <a:pPr lvl="1"/>
             <a:r>
               <a:rPr lang="en-US" dirty="0"/>
-              <a:t>A list with one element (</a:t>
-            </a:r>
-            <a:r>
-              <a:rPr lang="en-US" dirty="0" err="1"/>
-              <a:t>singelton</a:t>
-            </a:r>
-            <a:r>
-              <a:rPr lang="en-US" dirty="0"/>
-              <a:t>)</a:t>
+              <a:t>A list with one element (singleton)</a:t>
             </a:r>
           </a:p>
           <a:p>
